--- a/deep_learning/fine_tuning/FT-openai-structured-output-for-medical-domain/work-flow.pptx
+++ b/deep_learning/fine_tuning/FT-openai-structured-output-for-medical-domain/work-flow.pptx
@@ -5,19 +5,26 @@
     <p:sldMasterId id="2147483648" r:id="rId1"/>
   </p:sldMasterIdLst>
   <p:notesMasterIdLst>
-    <p:notesMasterId r:id="rId9"/>
+    <p:notesMasterId r:id="rId16"/>
   </p:notesMasterIdLst>
   <p:handoutMasterIdLst>
-    <p:handoutMasterId r:id="rId10"/>
+    <p:handoutMasterId r:id="rId17"/>
   </p:handoutMasterIdLst>
   <p:sldIdLst>
     <p:sldId id="257" r:id="rId2"/>
-    <p:sldId id="277" r:id="rId3"/>
-    <p:sldId id="276" r:id="rId4"/>
-    <p:sldId id="275" r:id="rId5"/>
-    <p:sldId id="279" r:id="rId6"/>
-    <p:sldId id="280" r:id="rId7"/>
-    <p:sldId id="278" r:id="rId8"/>
+    <p:sldId id="287" r:id="rId3"/>
+    <p:sldId id="286" r:id="rId4"/>
+    <p:sldId id="277" r:id="rId5"/>
+    <p:sldId id="281" r:id="rId6"/>
+    <p:sldId id="276" r:id="rId7"/>
+    <p:sldId id="275" r:id="rId8"/>
+    <p:sldId id="279" r:id="rId9"/>
+    <p:sldId id="283" r:id="rId10"/>
+    <p:sldId id="284" r:id="rId11"/>
+    <p:sldId id="282" r:id="rId12"/>
+    <p:sldId id="285" r:id="rId13"/>
+    <p:sldId id="280" r:id="rId14"/>
+    <p:sldId id="278" r:id="rId15"/>
   </p:sldIdLst>
   <p:sldSz cx="12192000" cy="6858000"/>
   <p:notesSz cx="6858000" cy="9144000"/>
@@ -221,7 +228,7 @@
           <a:p>
             <a:fld id="{7BAEECA8-D063-486F-AE31-5020270C1449}" type="datetimeFigureOut">
               <a:rPr lang="en-US" smtClean="0"/>
-              <a:t>4/26/2026</a:t>
+              <a:t>5/20/2026</a:t>
             </a:fld>
             <a:endParaRPr lang="en-US"/>
           </a:p>
@@ -344,6 +351,202 @@
 </inkml:ink>
 </file>
 
+<file path=ppt/ink/ink10.xml><?xml version="1.0" encoding="utf-8"?>
+<inkml:ink xmlns:inkml="http://www.w3.org/2003/InkML">
+  <inkml:definitions>
+    <inkml:context xml:id="ctx0">
+      <inkml:inkSource xml:id="inkSrc0">
+        <inkml:traceFormat>
+          <inkml:channel name="X" type="integer" min="-2.14748E9" max="2.14748E9" units="cm"/>
+          <inkml:channel name="Y" type="integer" min="-2.14748E9" max="2.14748E9" units="cm"/>
+          <inkml:channel name="F" type="integer" max="32767" units="dev"/>
+        </inkml:traceFormat>
+        <inkml:channelProperties>
+          <inkml:channelProperty channel="X" name="resolution" value="1000" units="1/cm"/>
+          <inkml:channelProperty channel="Y" name="resolution" value="1000" units="1/cm"/>
+          <inkml:channelProperty channel="F" name="resolution" value="0" units="1/dev"/>
+        </inkml:channelProperties>
+      </inkml:inkSource>
+      <inkml:timestamp xml:id="ts0" timeString="2026-05-20T15:43:15.865"/>
+    </inkml:context>
+    <inkml:brush xml:id="br0">
+      <inkml:brushProperty name="width" value="0.2" units="cm"/>
+      <inkml:brushProperty name="height" value="0.2" units="cm"/>
+      <inkml:brushProperty name="color" value="#FFC114"/>
+    </inkml:brush>
+  </inkml:definitions>
+  <inkml:trace contextRef="#ctx0" brushRef="#br0">1 217 24575,'4'2'0,"-1"0"0,1 0 0,-1 1 0,0-1 0,1 0 0,-1 1 0,0 0 0,0 0 0,-1 0 0,1 0 0,-1 0 0,1 1 0,1 4 0,5 3 0,-7-7 0,1-1 0,0 1 0,0-1 0,0 0 0,0 0 0,0 0 0,1-1 0,-1 1 0,1-1 0,0 0 0,-1 0 0,1 0 0,0 0 0,0-1 0,1 0 0,-1 0 0,0 0 0,9 1 0,-7-3 0,0 0 0,0 0 0,1 0 0,-1-1 0,0 0 0,0-1 0,-1 1 0,1-1 0,0 0 0,-1-1 0,0 1 0,7-7 0,31-25 17,39-42-1,-59 52-216,2 2 1,0 0-1,1 2 0,2 1 0,0 1 1,32-17-1</inkml:trace>
+</inkml:ink>
+</file>
+
+<file path=ppt/ink/ink11.xml><?xml version="1.0" encoding="utf-8"?>
+<inkml:ink xmlns:inkml="http://www.w3.org/2003/InkML">
+  <inkml:definitions>
+    <inkml:context xml:id="ctx0">
+      <inkml:inkSource xml:id="inkSrc0">
+        <inkml:traceFormat>
+          <inkml:channel name="X" type="integer" min="-2.14748E9" max="2.14748E9" units="cm"/>
+          <inkml:channel name="Y" type="integer" min="-2.14748E9" max="2.14748E9" units="cm"/>
+          <inkml:channel name="F" type="integer" max="32767" units="dev"/>
+        </inkml:traceFormat>
+        <inkml:channelProperties>
+          <inkml:channelProperty channel="X" name="resolution" value="1000" units="1/cm"/>
+          <inkml:channelProperty channel="Y" name="resolution" value="1000" units="1/cm"/>
+          <inkml:channelProperty channel="F" name="resolution" value="0" units="1/dev"/>
+        </inkml:channelProperties>
+      </inkml:inkSource>
+      <inkml:timestamp xml:id="ts0" timeString="2026-05-20T15:43:18.122"/>
+    </inkml:context>
+    <inkml:brush xml:id="br0">
+      <inkml:brushProperty name="width" value="0.2" units="cm"/>
+      <inkml:brushProperty name="height" value="0.2" units="cm"/>
+      <inkml:brushProperty name="color" value="#FFC114"/>
+    </inkml:brush>
+  </inkml:definitions>
+  <inkml:trace contextRef="#ctx0" brushRef="#br0">0 365 24575,'1'-1'0,"0"-1"0,1 1 0,-1 0 0,0 0 0,0 0 0,1 0 0,-1 0 0,0 0 0,1 0 0,-1 0 0,1 1 0,-1-1 0,1 0 0,0 1 0,-1-1 0,1 1 0,-1 0 0,1 0 0,0-1 0,-1 1 0,1 0 0,0 0 0,-1 1 0,1-1 0,0 0 0,-1 0 0,1 1 0,0-1 0,-1 1 0,1 0 0,-1-1 0,1 1 0,-1 0 0,1 0 0,-1 0 0,0 0 0,1 0 0,-1 0 0,0 0 0,0 0 0,0 1 0,0-1 0,0 0 0,1 3 0,6 8 0,-1 0 0,-1 1 0,1 0 0,5 19 0,-2-5 0,-3-13 0,1 4 0,0-1 0,1 0 0,22 28 0,-29-41 0,0-1 0,1 0 0,0 0 0,0 0 0,0 0 0,0-1 0,0 1 0,1-1 0,-1 0 0,1 0 0,0 0 0,-1 0 0,1 0 0,0-1 0,0 0 0,0 0 0,0 0 0,0 0 0,0-1 0,0 1 0,0-1 0,0 0 0,1 0 0,3-2 0,13-4 0,-1-1 0,0-1 0,-1-1 0,0-1 0,0 0 0,31-24 0,7-4 0,206-112 0,367-153 0,-590 287-682,48-14-1,-48 21-6143</inkml:trace>
+</inkml:ink>
+</file>
+
+<file path=ppt/ink/ink12.xml><?xml version="1.0" encoding="utf-8"?>
+<inkml:ink xmlns:inkml="http://www.w3.org/2003/InkML">
+  <inkml:definitions>
+    <inkml:context xml:id="ctx0">
+      <inkml:inkSource xml:id="inkSrc0">
+        <inkml:traceFormat>
+          <inkml:channel name="X" type="integer" min="-2.14748E9" max="2.14748E9" units="cm"/>
+          <inkml:channel name="Y" type="integer" min="-2.14748E9" max="2.14748E9" units="cm"/>
+          <inkml:channel name="F" type="integer" max="32767" units="dev"/>
+        </inkml:traceFormat>
+        <inkml:channelProperties>
+          <inkml:channelProperty channel="X" name="resolution" value="1000" units="1/cm"/>
+          <inkml:channelProperty channel="Y" name="resolution" value="1000" units="1/cm"/>
+          <inkml:channelProperty channel="F" name="resolution" value="0" units="1/dev"/>
+        </inkml:channelProperties>
+      </inkml:inkSource>
+      <inkml:timestamp xml:id="ts0" timeString="2026-05-20T15:43:20.270"/>
+    </inkml:context>
+    <inkml:brush xml:id="br0">
+      <inkml:brushProperty name="width" value="0.2" units="cm"/>
+      <inkml:brushProperty name="height" value="0.2" units="cm"/>
+      <inkml:brushProperty name="color" value="#FFC114"/>
+    </inkml:brush>
+  </inkml:definitions>
+  <inkml:trace contextRef="#ctx0" brushRef="#br0">0 87 24575,'7'1'0,"-1"0"0,0 0 0,0 1 0,0-1 0,0 1 0,-1 1 0,1-1 0,0 1 0,-1 0 0,0 0 0,1 0 0,-1 1 0,-1 0 0,1 0 0,6 7 0,7 9 0,0 1 0,17 24 0,-30-37 0,6 8 0,-1 0 0,0 1 0,10 22 0,-19-36 0,0 0 0,1-1 0,0 1 0,-1-1 0,1 1 0,0-1 0,0 0 0,0 0 0,0 0 0,1 0 0,-1 0 0,1-1 0,-1 1 0,1 0 0,-1-1 0,1 0 0,0 0 0,0 0 0,-1 0 0,1 0 0,0-1 0,0 1 0,0-1 0,0 1 0,0-1 0,0 0 0,0 0 0,0-1 0,0 1 0,0-1 0,5-1 0,12-3 0,-1-1 0,0-1 0,32-15 0,-30 12 0,242-129 0,-107 52 0,-126 71-455,0 0 0,36-29 0</inkml:trace>
+</inkml:ink>
+</file>
+
+<file path=ppt/ink/ink13.xml><?xml version="1.0" encoding="utf-8"?>
+<inkml:ink xmlns:inkml="http://www.w3.org/2003/InkML">
+  <inkml:definitions>
+    <inkml:context xml:id="ctx0">
+      <inkml:inkSource xml:id="inkSrc0">
+        <inkml:traceFormat>
+          <inkml:channel name="X" type="integer" min="-2.14748E9" max="2.14748E9" units="cm"/>
+          <inkml:channel name="Y" type="integer" min="-2.14748E9" max="2.14748E9" units="cm"/>
+          <inkml:channel name="F" type="integer" max="32767" units="dev"/>
+        </inkml:traceFormat>
+        <inkml:channelProperties>
+          <inkml:channelProperty channel="X" name="resolution" value="1000" units="1/cm"/>
+          <inkml:channelProperty channel="Y" name="resolution" value="1000" units="1/cm"/>
+          <inkml:channelProperty channel="F" name="resolution" value="0" units="1/dev"/>
+        </inkml:channelProperties>
+      </inkml:inkSource>
+      <inkml:timestamp xml:id="ts0" timeString="2026-05-20T15:43:22.683"/>
+    </inkml:context>
+    <inkml:brush xml:id="br0">
+      <inkml:brushProperty name="width" value="0.2" units="cm"/>
+      <inkml:brushProperty name="height" value="0.2" units="cm"/>
+      <inkml:brushProperty name="color" value="#FFC114"/>
+    </inkml:brush>
+  </inkml:definitions>
+  <inkml:trace contextRef="#ctx0" brushRef="#br0">0 521 24575,'0'-1'0,"1"0"0,-1 0 0,0 1 0,0-1 0,1 0 0,-1 0 0,0 1 0,1-1 0,-1 0 0,1 0 0,-1 1 0,1-1 0,-1 1 0,1-1 0,0 0 0,-1 1 0,1-1 0,0 1 0,-1 0 0,1-1 0,0 1 0,-1-1 0,1 1 0,0 0 0,0 0 0,0-1 0,-1 1 0,1 0 0,0 0 0,0 0 0,0 0 0,0 0 0,-1 0 0,1 0 0,0 0 0,0 0 0,0 1 0,-1-1 0,1 0 0,0 0 0,1 1 0,36 10 0,-24-3 0,0 1 0,0 0 0,-1 1 0,0 0 0,0 1 0,-2 0 0,1 1 0,-1 0 0,-1 1 0,0 1 0,15 27 0,-24-40 0,0 0 0,-1 0 0,1 1 0,0-1 0,0 0 0,0 0 0,0 0 0,0 0 0,0 0 0,0 0 0,1 0 0,-1-1 0,0 1 0,0 0 0,1-1 0,-1 1 0,0-1 0,1 1 0,-1-1 0,1 0 0,-1 1 0,0-1 0,1 0 0,-1 0 0,1 0 0,-1 0 0,1 0 0,-1 0 0,1-1 0,-1 1 0,3-1 0,4-2 0,0-1 0,0 1 0,0-2 0,10-6 0,-11 7 0,310-215 0,101-61 0,-157 153-1365,-161 89-5461</inkml:trace>
+</inkml:ink>
+</file>
+
+<file path=ppt/ink/ink14.xml><?xml version="1.0" encoding="utf-8"?>
+<inkml:ink xmlns:inkml="http://www.w3.org/2003/InkML">
+  <inkml:definitions>
+    <inkml:context xml:id="ctx0">
+      <inkml:inkSource xml:id="inkSrc0">
+        <inkml:traceFormat>
+          <inkml:channel name="X" type="integer" min="-2.14748E9" max="2.14748E9" units="cm"/>
+          <inkml:channel name="Y" type="integer" min="-2.14748E9" max="2.14748E9" units="cm"/>
+          <inkml:channel name="F" type="integer" max="32767" units="dev"/>
+        </inkml:traceFormat>
+        <inkml:channelProperties>
+          <inkml:channelProperty channel="X" name="resolution" value="1000" units="1/cm"/>
+          <inkml:channelProperty channel="Y" name="resolution" value="1000" units="1/cm"/>
+          <inkml:channelProperty channel="F" name="resolution" value="0" units="1/dev"/>
+        </inkml:channelProperties>
+      </inkml:inkSource>
+      <inkml:timestamp xml:id="ts0" timeString="2026-05-20T16:10:47.597"/>
+    </inkml:context>
+    <inkml:brush xml:id="br0">
+      <inkml:brushProperty name="width" value="0.2" units="cm"/>
+      <inkml:brushProperty name="height" value="0.2" units="cm"/>
+      <inkml:brushProperty name="color" value="#FFC114"/>
+    </inkml:brush>
+  </inkml:definitions>
+  <inkml:trace contextRef="#ctx0" brushRef="#br0">0 588 24575,'3'1'0,"-1"-1"0,1 1 0,0 0 0,-1 0 0,1 0 0,-1 1 0,0-1 0,1 0 0,-1 1 0,0 0 0,0-1 0,0 1 0,0 0 0,0 0 0,2 3 0,22 35 0,37 180 0,-57-202 0,-4-9 0,0-1 0,1 0 0,0 0 0,9 14 0,-12-21 0,1 1 0,0-1 0,0 0 0,0 0 0,-1 0 0,1 0 0,0 0 0,0-1 0,0 1 0,1 0 0,-1 0 0,0-1 0,0 1 0,0 0 0,1-1 0,-1 1 0,0-1 0,0 0 0,1 1 0,-1-1 0,0 0 0,1 0 0,-1 0 0,0 0 0,1 0 0,-1 0 0,0 0 0,1 0 0,-1-1 0,0 1 0,1 0 0,-1-1 0,0 1 0,0-1 0,1 1 0,-1-1 0,1-1 0,11-7 0,-1-1 0,0-1 0,-1 0 0,0-1 0,0 0 0,-2 0 0,1-1 0,10-22 0,3 0 0,-4 4 0,-1 0 0,17-46 0,-24 49 0,1 2 0,2 0 0,0 0 0,32-42 0,12 6 0,81-67 0,-86 82 0,21-11 0,-51 43 0,-2-1 0,32-32 0,61-60-1365</inkml:trace>
+</inkml:ink>
+</file>
+
+<file path=ppt/ink/ink15.xml><?xml version="1.0" encoding="utf-8"?>
+<inkml:ink xmlns:inkml="http://www.w3.org/2003/InkML">
+  <inkml:definitions>
+    <inkml:context xml:id="ctx0">
+      <inkml:inkSource xml:id="inkSrc0">
+        <inkml:traceFormat>
+          <inkml:channel name="X" type="integer" min="-2.14748E9" max="2.14748E9" units="cm"/>
+          <inkml:channel name="Y" type="integer" min="-2.14748E9" max="2.14748E9" units="cm"/>
+          <inkml:channel name="F" type="integer" max="32767" units="dev"/>
+        </inkml:traceFormat>
+        <inkml:channelProperties>
+          <inkml:channelProperty channel="X" name="resolution" value="1000" units="1/cm"/>
+          <inkml:channelProperty channel="Y" name="resolution" value="1000" units="1/cm"/>
+          <inkml:channelProperty channel="F" name="resolution" value="0" units="1/dev"/>
+        </inkml:channelProperties>
+      </inkml:inkSource>
+      <inkml:timestamp xml:id="ts0" timeString="2026-05-20T15:41:24.326"/>
+    </inkml:context>
+    <inkml:brush xml:id="br0">
+      <inkml:brushProperty name="width" value="0.1" units="cm"/>
+      <inkml:brushProperty name="height" value="0.1" units="cm"/>
+      <inkml:brushProperty name="color" value="#FFC114"/>
+    </inkml:brush>
+  </inkml:definitions>
+  <inkml:trace contextRef="#ctx0" brushRef="#br0">1375 58 24575,'-1'-2'0,"1"0"0,-1 0 0,0 1 0,0-1 0,0 1 0,0-1 0,0 0 0,0 1 0,0 0 0,0-1 0,0 1 0,-1 0 0,1-1 0,-1 1 0,1 0 0,-1 0 0,1 0 0,-1 0 0,1 1 0,-1-1 0,0 0 0,0 1 0,-2-1 0,-44-12 0,-12 5 0,-1 3 0,0 3 0,-65 6 0,0-1 0,-21-6 0,-160 6 0,291 0 0,0-1 0,0 2 0,0 0 0,0 1 0,1 1 0,0 0 0,0 1 0,0 0 0,1 1 0,0 1 0,-14 12 0,11-7 0,0 1 0,1 0 0,1 1 0,1 1 0,0 0 0,1 1 0,-20 38 0,21-30 0,2 2 0,0 0 0,2 0 0,1 0 0,1 1 0,-3 42 0,2 177 0,6 17 0,5 157 0,-3-400 0,1 0 0,1 0 0,2-1 0,0 1 0,1-1 0,1-1 0,1 1 0,0-1 0,2 0 0,20 30 0,-24-44 0,0 1 0,0-1 0,1-1 0,0 1 0,0-1 0,1 0 0,-1-1 0,10 5 0,71 26 0,-67-27 0,18 7 0,0-1 0,1-1 0,0-3 0,1-1 0,0-2 0,61 2 0,567-13-1365,-639 4-5461</inkml:trace>
+</inkml:ink>
+</file>
+
+<file path=ppt/ink/ink16.xml><?xml version="1.0" encoding="utf-8"?>
+<inkml:ink xmlns:inkml="http://www.w3.org/2003/InkML">
+  <inkml:definitions>
+    <inkml:context xml:id="ctx0">
+      <inkml:inkSource xml:id="inkSrc0">
+        <inkml:traceFormat>
+          <inkml:channel name="X" type="integer" min="-2.14748E9" max="2.14748E9" units="cm"/>
+          <inkml:channel name="Y" type="integer" min="-2.14748E9" max="2.14748E9" units="cm"/>
+          <inkml:channel name="F" type="integer" max="32767" units="dev"/>
+        </inkml:traceFormat>
+        <inkml:channelProperties>
+          <inkml:channelProperty channel="X" name="resolution" value="1000" units="1/cm"/>
+          <inkml:channelProperty channel="Y" name="resolution" value="1000" units="1/cm"/>
+          <inkml:channelProperty channel="F" name="resolution" value="0" units="1/dev"/>
+        </inkml:channelProperties>
+      </inkml:inkSource>
+      <inkml:timestamp xml:id="ts0" timeString="2026-05-20T15:41:48.129"/>
+    </inkml:context>
+    <inkml:brush xml:id="br0">
+      <inkml:brushProperty name="width" value="0.1" units="cm"/>
+      <inkml:brushProperty name="height" value="0.1" units="cm"/>
+      <inkml:brushProperty name="color" value="#FFC114"/>
+    </inkml:brush>
+  </inkml:definitions>
+  <inkml:trace contextRef="#ctx0" brushRef="#br0">713 0 24575,'-397'22'0,"339"-17"0,46-4 0,1 1 0,0 0 0,0 0 0,0 1 0,0 1 0,1 0 0,-1 0 0,-15 10 0,21-11 0,0 0 0,1 0 0,-1 1 0,1 0 0,-1 0 0,1 0 0,0 0 0,1 1 0,-1 0 0,1-1 0,0 1 0,0 0 0,1 1 0,-1-1 0,1 0 0,0 1 0,1 0 0,-2 6 0,-9 150 0,6-58 0,-5 516 0,14-370 0,-3 573 0,-2-788 0,-1-1 0,-2 0 0,-11 39 0,7-38 0,2 0 0,-4 70 0,13 633 0,-2-735 0,0 0 0,0 0 0,1 0 0,-1 0 0,1 0 0,-1 0 0,1 0 0,0 0 0,0 0 0,1 0 0,-1-1 0,0 1 0,1 0 0,0-1 0,-1 1 0,1-1 0,0 0 0,1 0 0,-1 1 0,0-1 0,0-1 0,1 1 0,-1 0 0,1-1 0,0 1 0,-1-1 0,1 0 0,0 1 0,0-1 0,0-1 0,4 2 0,10 1 0,1-1 0,-1 0 0,0-2 0,27-1 0,-17 0 0,562-4-1365,-547 5-5461</inkml:trace>
+</inkml:ink>
+</file>
+
 <file path=ppt/ink/ink2.xml><?xml version="1.0" encoding="utf-8"?>
 <inkml:ink xmlns:inkml="http://www.w3.org/2003/InkML">
   <inkml:definitions>
@@ -372,6 +575,202 @@
 </inkml:ink>
 </file>
 
+<file path=ppt/ink/ink3.xml><?xml version="1.0" encoding="utf-8"?>
+<inkml:ink xmlns:inkml="http://www.w3.org/2003/InkML">
+  <inkml:definitions>
+    <inkml:context xml:id="ctx0">
+      <inkml:inkSource xml:id="inkSrc0">
+        <inkml:traceFormat>
+          <inkml:channel name="X" type="integer" min="-2.14748E9" max="2.14748E9" units="cm"/>
+          <inkml:channel name="Y" type="integer" min="-2.14748E9" max="2.14748E9" units="cm"/>
+          <inkml:channel name="F" type="integer" max="32767" units="dev"/>
+        </inkml:traceFormat>
+        <inkml:channelProperties>
+          <inkml:channelProperty channel="X" name="resolution" value="1000" units="1/cm"/>
+          <inkml:channelProperty channel="Y" name="resolution" value="1000" units="1/cm"/>
+          <inkml:channelProperty channel="F" name="resolution" value="0" units="1/dev"/>
+        </inkml:channelProperties>
+      </inkml:inkSource>
+      <inkml:timestamp xml:id="ts0" timeString="2026-05-20T15:33:09.883"/>
+    </inkml:context>
+    <inkml:brush xml:id="br0">
+      <inkml:brushProperty name="width" value="0.1" units="cm"/>
+      <inkml:brushProperty name="height" value="0.1" units="cm"/>
+      <inkml:brushProperty name="color" value="#FFC114"/>
+    </inkml:brush>
+  </inkml:definitions>
+  <inkml:trace contextRef="#ctx0" brushRef="#br0">0 328 24575,'2'0'0,"0"1"0,-1-1 0,1 1 0,0-1 0,-1 1 0,1 0 0,-1 0 0,1 0 0,-1 0 0,1 0 0,-1 0 0,0 0 0,1 1 0,-1-1 0,0 0 0,0 1 0,0-1 0,0 1 0,1 2 0,21 41 0,-12-20 0,45 73 0,24 40 0,-79-135 0,1-1 0,-1 1 0,1-1 0,0 1 0,0-1 0,0 0 0,0 0 0,0 0 0,0 0 0,0 0 0,1-1 0,-1 1 0,1-1 0,-1 1 0,1-1 0,-1 0 0,1 0 0,0 0 0,0-1 0,0 1 0,-1 0 0,1-1 0,0 0 0,0 0 0,0 0 0,0 0 0,0 0 0,0 0 0,-1-1 0,1 1 0,0-1 0,0 0 0,0 0 0,-1 0 0,1 0 0,-1-1 0,1 1 0,-1-1 0,1 1 0,-1-1 0,0 0 0,3-3 0,14-12 0,-1-2 0,-1 0 0,-1-1 0,15-23 0,18-22 0,224-215 0,-173 185 0,-5 18-404,-77 64-557,15-12-5865</inkml:trace>
+</inkml:ink>
+</file>
+
+<file path=ppt/ink/ink4.xml><?xml version="1.0" encoding="utf-8"?>
+<inkml:ink xmlns:inkml="http://www.w3.org/2003/InkML">
+  <inkml:definitions>
+    <inkml:context xml:id="ctx0">
+      <inkml:inkSource xml:id="inkSrc0">
+        <inkml:traceFormat>
+          <inkml:channel name="X" type="integer" min="-2.14748E9" max="2.14748E9" units="cm"/>
+          <inkml:channel name="Y" type="integer" min="-2.14748E9" max="2.14748E9" units="cm"/>
+          <inkml:channel name="F" type="integer" max="32767" units="dev"/>
+        </inkml:traceFormat>
+        <inkml:channelProperties>
+          <inkml:channelProperty channel="X" name="resolution" value="1000" units="1/cm"/>
+          <inkml:channelProperty channel="Y" name="resolution" value="1000" units="1/cm"/>
+          <inkml:channelProperty channel="F" name="resolution" value="0" units="1/dev"/>
+        </inkml:channelProperties>
+      </inkml:inkSource>
+      <inkml:timestamp xml:id="ts0" timeString="2026-05-20T15:33:13.891"/>
+    </inkml:context>
+    <inkml:brush xml:id="br0">
+      <inkml:brushProperty name="width" value="0.1" units="cm"/>
+      <inkml:brushProperty name="height" value="0.1" units="cm"/>
+      <inkml:brushProperty name="color" value="#FFC114"/>
+    </inkml:brush>
+  </inkml:definitions>
+  <inkml:trace contextRef="#ctx0" brushRef="#br0">433 5 24575,'-82'-2'0,"42"0"0,-1 2 0,1 1 0,-75 13 0,110-13 0,1 0 0,-1 0 0,1 1 0,0-1 0,-1 1 0,1 0 0,0 0 0,0 1 0,0-1 0,0 1 0,1 0 0,-1 0 0,1 0 0,0 0 0,0 1 0,0-1 0,0 1 0,0 0 0,1 0 0,0 0 0,-1 0 0,2 0 0,-3 5 0,1 6 0,0 1 0,0-1 0,2 1 0,0-1 0,1 26 0,5 126 0,-4 209 0,-13-296 0,7-60 0,2 1 0,0-1 0,1 37 0,2-54 0,1-1 0,-1 1 0,1-1 0,-1 0 0,1 1 0,0-1 0,0 1 0,0-1 0,0 0 0,1 0 0,-1 0 0,1 1 0,-1-1 0,1-1 0,0 1 0,0 0 0,-1 0 0,1-1 0,1 1 0,-1-1 0,0 1 0,0-1 0,0 0 0,1 0 0,-1 0 0,0 0 0,1 0 0,-1-1 0,1 1 0,-1-1 0,5 1 0,10 0 0,0 0 0,1 0 0,29-5 0,-15 2 0,366-1-41,-254 4-1283,-114-1-5502</inkml:trace>
+</inkml:ink>
+</file>
+
+<file path=ppt/ink/ink5.xml><?xml version="1.0" encoding="utf-8"?>
+<inkml:ink xmlns:inkml="http://www.w3.org/2003/InkML">
+  <inkml:definitions>
+    <inkml:context xml:id="ctx0">
+      <inkml:inkSource xml:id="inkSrc0">
+        <inkml:traceFormat>
+          <inkml:channel name="X" type="integer" min="-2.14748E9" max="2.14748E9" units="cm"/>
+          <inkml:channel name="Y" type="integer" min="-2.14748E9" max="2.14748E9" units="cm"/>
+          <inkml:channel name="F" type="integer" max="32767" units="dev"/>
+        </inkml:traceFormat>
+        <inkml:channelProperties>
+          <inkml:channelProperty channel="X" name="resolution" value="1000" units="1/cm"/>
+          <inkml:channelProperty channel="Y" name="resolution" value="1000" units="1/cm"/>
+          <inkml:channelProperty channel="F" name="resolution" value="0" units="1/dev"/>
+        </inkml:channelProperties>
+      </inkml:inkSource>
+      <inkml:timestamp xml:id="ts0" timeString="2026-05-20T15:39:38.259"/>
+    </inkml:context>
+    <inkml:brush xml:id="br0">
+      <inkml:brushProperty name="width" value="0.1" units="cm"/>
+      <inkml:brushProperty name="height" value="0.1" units="cm"/>
+      <inkml:brushProperty name="color" value="#FFC114"/>
+    </inkml:brush>
+  </inkml:definitions>
+  <inkml:trace contextRef="#ctx0" brushRef="#br0">1629 0 24575,'-708'0'0,"655"3"0,0 3 0,-81 17 0,39-4 0,73-14 0,0 1 0,0 1 0,-21 10 0,-27 10 0,33-13 0,0 2 0,1 2 0,1 1 0,0 2 0,2 2 0,-48 40 0,72-55 0,0 0 0,0 1 0,1 0 0,0 0 0,0 1 0,1 0 0,1 0 0,-1 1 0,2 0 0,-8 18 0,7-9 0,1 1 0,1-1 0,0 1 0,2-1 0,-1 30 0,3-39 0,3 286 0,-3-292 0,1 0 0,-1 0 0,1 0 0,0 0 0,1-1 0,-1 1 0,1 0 0,0-1 0,0 1 0,0-1 0,1 1 0,-1-1 0,1 0 0,0 0 0,0 0 0,1-1 0,6 7 0,0-4 0,-1 0 0,1-1 0,-1 0 0,2-1 0,-1 0 0,0 0 0,15 2 0,360 69 0,-143-32 0,-164-30 0,139 6 0,80-20 0,-112-1 0,-123-2 0,0-2 0,75-17 0,-48 7 0,-64 12 0,0-1 0,-1-1 0,0-1 0,0 0 0,0-2 0,-1-1 0,-1-1 0,0-1 0,0-1 0,-1-1 0,25-22 0,20-18 0,-18 16 0,-2-2 0,53-60 0,-92 92 0,0-1 0,-1-1 0,0 1 0,0-1 0,-1 0 0,0-1 0,-1 1 0,0-1 0,-1 1 0,0-1 0,0 0 0,-2-1 0,1 1 0,-1 0 0,-1 0 0,-1-19 0,-1 16 0,0 0 0,-1 0 0,-1 1 0,-1-1 0,1 1 0,-2 0 0,0 0 0,-1 1 0,0 0 0,0 0 0,-2 0 0,-15-17 0,11 16 0,-1 0 0,-1 1 0,0 0 0,0 1 0,-1 1 0,-1 0 0,-29-12 0,-11 0 0,-62-14 0,63 20 0,20 4 0,-1 3 0,0 1 0,0 1 0,-1 2 0,-44 1 0,-96 5-1365,156-1-5461</inkml:trace>
+</inkml:ink>
+</file>
+
+<file path=ppt/ink/ink6.xml><?xml version="1.0" encoding="utf-8"?>
+<inkml:ink xmlns:inkml="http://www.w3.org/2003/InkML">
+  <inkml:definitions>
+    <inkml:context xml:id="ctx0">
+      <inkml:inkSource xml:id="inkSrc0">
+        <inkml:traceFormat>
+          <inkml:channel name="X" type="integer" min="-2.14748E9" max="2.14748E9" units="cm"/>
+          <inkml:channel name="Y" type="integer" min="-2.14748E9" max="2.14748E9" units="cm"/>
+          <inkml:channel name="F" type="integer" max="32767" units="dev"/>
+        </inkml:traceFormat>
+        <inkml:channelProperties>
+          <inkml:channelProperty channel="X" name="resolution" value="1000" units="1/cm"/>
+          <inkml:channelProperty channel="Y" name="resolution" value="1000" units="1/cm"/>
+          <inkml:channelProperty channel="F" name="resolution" value="0" units="1/dev"/>
+        </inkml:channelProperties>
+      </inkml:inkSource>
+      <inkml:timestamp xml:id="ts0" timeString="2026-05-20T15:39:49.182"/>
+    </inkml:context>
+    <inkml:brush xml:id="br0">
+      <inkml:brushProperty name="width" value="0.1" units="cm"/>
+      <inkml:brushProperty name="height" value="0.1" units="cm"/>
+      <inkml:brushProperty name="color" value="#FFC114"/>
+    </inkml:brush>
+  </inkml:definitions>
+  <inkml:trace contextRef="#ctx0" brushRef="#br0">1378 1 24575,'-834'0'0,"814"1"0,1 0 0,-1 2 0,1 0 0,0 2 0,0 0 0,0 1 0,-25 12 0,13-4 0,2 2 0,0 1 0,-41 32 0,50-32 0,1 2 0,0 0 0,2 1 0,0 1 0,1 0 0,1 2 0,1-1 0,1 2 0,1 0 0,-12 34 0,19-39 0,0 0 0,2 0 0,0 0 0,1 0 0,0 23 0,9 97 0,-6-129 0,1 0 0,0 0 0,1 0 0,0-1 0,0 1 0,1-1 0,0 0 0,1 0 0,0-1 0,0 1 0,1-1 0,0 0 0,1 0 0,-1-1 0,1 0 0,15 12 0,9 3 0,0-1 0,1-2 0,41 18 0,-46-23 0,8 2 0,0-2 0,1-1 0,1-1 0,60 9 0,154 10 0,-245-31 0,114 7 0,52 6 0,-73-3 0,196-7 0,-146-6 0,-31 5 0,130-5 0,-234 1 0,-1-1 0,1-1 0,-1 0 0,1-1 0,-1-1 0,0 0 0,-1 0 0,0-2 0,0 1 0,0-2 0,-1 1 0,0-1 0,-1-1 0,0 0 0,-1-1 0,0 1 0,0-2 0,-1 1 0,13-25 0,-15 11 0,-1 0 0,-1 0 0,-1 0 0,-1 0 0,-1 0 0,-2 0 0,-3-33 0,0-26 0,5 32 0,1 30 0,-2 0 0,0 0 0,-5-24 0,4 40 0,0 0 0,0-1 0,-1 1 0,0 0 0,-1 0 0,0 1 0,1-1 0,-2 0 0,1 1 0,-1-1 0,1 1 0,-1 0 0,-1 1 0,1-1 0,-6-4 0,-37-23 0,-1 1 0,-1 3 0,-58-23 0,52 24 0,22 14 0,0 2 0,0 1 0,-1 1 0,-1 2 0,-47-3 0,-43-10 0,100 14 0,-181-30 0,185 32-1365,5-2-5461</inkml:trace>
+</inkml:ink>
+</file>
+
+<file path=ppt/ink/ink7.xml><?xml version="1.0" encoding="utf-8"?>
+<inkml:ink xmlns:inkml="http://www.w3.org/2003/InkML">
+  <inkml:definitions>
+    <inkml:context xml:id="ctx0">
+      <inkml:inkSource xml:id="inkSrc0">
+        <inkml:traceFormat>
+          <inkml:channel name="X" type="integer" min="-2.14748E9" max="2.14748E9" units="cm"/>
+          <inkml:channel name="Y" type="integer" min="-2.14748E9" max="2.14748E9" units="cm"/>
+          <inkml:channel name="F" type="integer" max="32767" units="dev"/>
+        </inkml:traceFormat>
+        <inkml:channelProperties>
+          <inkml:channelProperty channel="X" name="resolution" value="1000" units="1/cm"/>
+          <inkml:channelProperty channel="Y" name="resolution" value="1000" units="1/cm"/>
+          <inkml:channelProperty channel="F" name="resolution" value="0" units="1/dev"/>
+        </inkml:channelProperties>
+      </inkml:inkSource>
+      <inkml:timestamp xml:id="ts0" timeString="2026-05-20T15:45:21.416"/>
+    </inkml:context>
+    <inkml:brush xml:id="br0">
+      <inkml:brushProperty name="width" value="0.2" units="cm"/>
+      <inkml:brushProperty name="height" value="0.2" units="cm"/>
+      <inkml:brushProperty name="color" value="#FFC114"/>
+    </inkml:brush>
+  </inkml:definitions>
+  <inkml:trace contextRef="#ctx0" brushRef="#br0">0 82 24575,'61'-10'0,"-8"0"0,564 1 0,-349 12 0,-117-1 0,158-5 0,-277 0-273,0-3 0,-1 0 0,0-2 0,58-23 0</inkml:trace>
+</inkml:ink>
+</file>
+
+<file path=ppt/ink/ink8.xml><?xml version="1.0" encoding="utf-8"?>
+<inkml:ink xmlns:inkml="http://www.w3.org/2003/InkML">
+  <inkml:definitions>
+    <inkml:context xml:id="ctx0">
+      <inkml:inkSource xml:id="inkSrc0">
+        <inkml:traceFormat>
+          <inkml:channel name="X" type="integer" min="-2.14748E9" max="2.14748E9" units="cm"/>
+          <inkml:channel name="Y" type="integer" min="-2.14748E9" max="2.14748E9" units="cm"/>
+          <inkml:channel name="F" type="integer" max="32767" units="dev"/>
+        </inkml:traceFormat>
+        <inkml:channelProperties>
+          <inkml:channelProperty channel="X" name="resolution" value="1000" units="1/cm"/>
+          <inkml:channelProperty channel="Y" name="resolution" value="1000" units="1/cm"/>
+          <inkml:channelProperty channel="F" name="resolution" value="0" units="1/dev"/>
+        </inkml:channelProperties>
+      </inkml:inkSource>
+      <inkml:timestamp xml:id="ts0" timeString="2026-05-20T15:45:24.410"/>
+    </inkml:context>
+    <inkml:brush xml:id="br0">
+      <inkml:brushProperty name="width" value="0.2" units="cm"/>
+      <inkml:brushProperty name="height" value="0.2" units="cm"/>
+      <inkml:brushProperty name="color" value="#FFC114"/>
+    </inkml:brush>
+  </inkml:definitions>
+  <inkml:trace contextRef="#ctx0" brushRef="#br0">0 294 24575,'4'0'0,"6"4"0,2 6 0,-2 6 0,6 8 0,5 0 0,11-12 0,14-17 0,25-21 0,26-18 0,27-11 0,1-5 0,-13 9 0,-7 3 0,-17 6 0,-20 10 0,-22 11-8191</inkml:trace>
+</inkml:ink>
+</file>
+
+<file path=ppt/ink/ink9.xml><?xml version="1.0" encoding="utf-8"?>
+<inkml:ink xmlns:inkml="http://www.w3.org/2003/InkML">
+  <inkml:definitions>
+    <inkml:context xml:id="ctx0">
+      <inkml:inkSource xml:id="inkSrc0">
+        <inkml:traceFormat>
+          <inkml:channel name="X" type="integer" min="-2.14748E9" max="2.14748E9" units="cm"/>
+          <inkml:channel name="Y" type="integer" min="-2.14748E9" max="2.14748E9" units="cm"/>
+          <inkml:channel name="F" type="integer" max="32767" units="dev"/>
+        </inkml:traceFormat>
+        <inkml:channelProperties>
+          <inkml:channelProperty channel="X" name="resolution" value="1000" units="1/cm"/>
+          <inkml:channelProperty channel="Y" name="resolution" value="1000" units="1/cm"/>
+          <inkml:channelProperty channel="F" name="resolution" value="0" units="1/dev"/>
+        </inkml:channelProperties>
+      </inkml:inkSource>
+      <inkml:timestamp xml:id="ts0" timeString="2026-05-20T15:45:25.701"/>
+    </inkml:context>
+    <inkml:brush xml:id="br0">
+      <inkml:brushProperty name="width" value="0.2" units="cm"/>
+      <inkml:brushProperty name="height" value="0.2" units="cm"/>
+      <inkml:brushProperty name="color" value="#FFC114"/>
+    </inkml:brush>
+  </inkml:definitions>
+  <inkml:trace contextRef="#ctx0" brushRef="#br0">0 293 24575,'1'31'0,"1"0"0,1 0 0,1 0 0,2 0 0,2-1 0,0 0 0,2 0 0,18 37 0,-27-64 0,1 1 0,-1-1 0,1-1 0,-1 1 0,1 0 0,0 0 0,0-1 0,0 1 0,0-1 0,1 1 0,-1-1 0,1 0 0,-1 0 0,1 0 0,0 0 0,0-1 0,0 1 0,0-1 0,0 1 0,0-1 0,0 0 0,0 0 0,1-1 0,-1 1 0,5 0 0,-2-2 0,1-1 0,-1 1 0,0-1 0,1 0 0,-1 0 0,0-1 0,0 0 0,-1 0 0,1 0 0,-1-1 0,1 0 0,5-6 0,170-137 0,344-258 0,-512 396-170,0 0-1,0 1 0,1 0 1,0 1-1,1 0 0,0 1 1,18-5-1</inkml:trace>
+</inkml:ink>
+</file>
+
 <file path=ppt/notesMasters/notesMaster1.xml><?xml version="1.0" encoding="utf-8"?>
 <p:notesMaster xmlns:a="http://schemas.openxmlformats.org/drawingml/2006/main" xmlns:r="http://schemas.openxmlformats.org/officeDocument/2006/relationships" xmlns:p="http://schemas.openxmlformats.org/presentationml/2006/main">
   <p:cSld>
@@ -454,7 +853,7 @@
           <a:p>
             <a:fld id="{CB233BD1-3BA8-448D-9D08-7846095EA517}" type="datetimeFigureOut">
               <a:rPr lang="en-US" smtClean="0"/>
-              <a:t>4/26/2026</a:t>
+              <a:t>5/20/2026</a:t>
             </a:fld>
             <a:endParaRPr lang="en-US"/>
           </a:p>
@@ -868,7 +1267,7 @@
           <a:p>
             <a:fld id="{6383FAE1-13DE-4511-8C1B-C8AFB720664C}" type="datetimeFigureOut">
               <a:rPr lang="en-US" smtClean="0"/>
-              <a:t>4/26/2026</a:t>
+              <a:t>5/20/2026</a:t>
             </a:fld>
             <a:endParaRPr lang="en-US"/>
           </a:p>
@@ -1066,7 +1465,7 @@
           <a:p>
             <a:fld id="{6383FAE1-13DE-4511-8C1B-C8AFB720664C}" type="datetimeFigureOut">
               <a:rPr lang="en-US" smtClean="0"/>
-              <a:t>4/26/2026</a:t>
+              <a:t>5/20/2026</a:t>
             </a:fld>
             <a:endParaRPr lang="en-US"/>
           </a:p>
@@ -1274,7 +1673,7 @@
           <a:p>
             <a:fld id="{6383FAE1-13DE-4511-8C1B-C8AFB720664C}" type="datetimeFigureOut">
               <a:rPr lang="en-US" smtClean="0"/>
-              <a:t>4/26/2026</a:t>
+              <a:t>5/20/2026</a:t>
             </a:fld>
             <a:endParaRPr lang="en-US"/>
           </a:p>
@@ -1472,7 +1871,7 @@
           <a:p>
             <a:fld id="{6383FAE1-13DE-4511-8C1B-C8AFB720664C}" type="datetimeFigureOut">
               <a:rPr lang="en-US" smtClean="0"/>
-              <a:t>4/26/2026</a:t>
+              <a:t>5/20/2026</a:t>
             </a:fld>
             <a:endParaRPr lang="en-US"/>
           </a:p>
@@ -1747,7 +2146,7 @@
           <a:p>
             <a:fld id="{6383FAE1-13DE-4511-8C1B-C8AFB720664C}" type="datetimeFigureOut">
               <a:rPr lang="en-US" smtClean="0"/>
-              <a:t>4/26/2026</a:t>
+              <a:t>5/20/2026</a:t>
             </a:fld>
             <a:endParaRPr lang="en-US"/>
           </a:p>
@@ -2012,7 +2411,7 @@
           <a:p>
             <a:fld id="{6383FAE1-13DE-4511-8C1B-C8AFB720664C}" type="datetimeFigureOut">
               <a:rPr lang="en-US" smtClean="0"/>
-              <a:t>4/26/2026</a:t>
+              <a:t>5/20/2026</a:t>
             </a:fld>
             <a:endParaRPr lang="en-US"/>
           </a:p>
@@ -2424,7 +2823,7 @@
           <a:p>
             <a:fld id="{6383FAE1-13DE-4511-8C1B-C8AFB720664C}" type="datetimeFigureOut">
               <a:rPr lang="en-US" smtClean="0"/>
-              <a:t>4/26/2026</a:t>
+              <a:t>5/20/2026</a:t>
             </a:fld>
             <a:endParaRPr lang="en-US"/>
           </a:p>
@@ -2565,7 +2964,7 @@
           <a:p>
             <a:fld id="{6383FAE1-13DE-4511-8C1B-C8AFB720664C}" type="datetimeFigureOut">
               <a:rPr lang="en-US" smtClean="0"/>
-              <a:t>4/26/2026</a:t>
+              <a:t>5/20/2026</a:t>
             </a:fld>
             <a:endParaRPr lang="en-US"/>
           </a:p>
@@ -2678,7 +3077,7 @@
           <a:p>
             <a:fld id="{6383FAE1-13DE-4511-8C1B-C8AFB720664C}" type="datetimeFigureOut">
               <a:rPr lang="en-US" smtClean="0"/>
-              <a:t>4/26/2026</a:t>
+              <a:t>5/20/2026</a:t>
             </a:fld>
             <a:endParaRPr lang="en-US"/>
           </a:p>
@@ -2989,7 +3388,7 @@
           <a:p>
             <a:fld id="{6383FAE1-13DE-4511-8C1B-C8AFB720664C}" type="datetimeFigureOut">
               <a:rPr lang="en-US" smtClean="0"/>
-              <a:t>4/26/2026</a:t>
+              <a:t>5/20/2026</a:t>
             </a:fld>
             <a:endParaRPr lang="en-US"/>
           </a:p>
@@ -3280,7 +3679,7 @@
           <a:p>
             <a:fld id="{6383FAE1-13DE-4511-8C1B-C8AFB720664C}" type="datetimeFigureOut">
               <a:rPr lang="en-US" smtClean="0"/>
-              <a:t>4/26/2026</a:t>
+              <a:t>5/20/2026</a:t>
             </a:fld>
             <a:endParaRPr lang="en-US"/>
           </a:p>
@@ -3524,7 +3923,7 @@
           <a:p>
             <a:fld id="{6383FAE1-13DE-4511-8C1B-C8AFB720664C}" type="datetimeFigureOut">
               <a:rPr lang="en-US" smtClean="0"/>
-              <a:t>4/26/2026</a:t>
+              <a:t>5/20/2026</a:t>
             </a:fld>
             <a:endParaRPr lang="en-US"/>
           </a:p>
@@ -4138,7 +4537,7 @@
 </p:sld>
 </file>
 
-<file path=ppt/slides/slide2.xml><?xml version="1.0" encoding="utf-8"?>
+<file path=ppt/slides/slide10.xml><?xml version="1.0" encoding="utf-8"?>
 <p:sld xmlns:a="http://schemas.openxmlformats.org/drawingml/2006/main" xmlns:r="http://schemas.openxmlformats.org/officeDocument/2006/relationships" xmlns:p="http://schemas.openxmlformats.org/presentationml/2006/main">
   <p:cSld>
     <p:spTree>
@@ -4146,7 +4545,7 @@
         <p:cNvPr id="1" name="">
           <a:extLst>
             <a:ext uri="{FF2B5EF4-FFF2-40B4-BE49-F238E27FC236}">
-              <a16:creationId xmlns:a16="http://schemas.microsoft.com/office/drawing/2014/main" id="{A3FA17B0-2317-6300-05E6-CA7871758162}"/>
+              <a16:creationId xmlns:a16="http://schemas.microsoft.com/office/drawing/2014/main" id="{EA4E9C45-475B-06EC-9470-C65C8B18EAF9}"/>
             </a:ext>
           </a:extLst>
         </p:cNvPr>
@@ -4166,7 +4565,7 @@
           <p:cNvPr id="2" name="TextBox 1">
             <a:extLst>
               <a:ext uri="{FF2B5EF4-FFF2-40B4-BE49-F238E27FC236}">
-                <a16:creationId xmlns:a16="http://schemas.microsoft.com/office/drawing/2014/main" id="{ABFC6C65-0BA4-0169-396C-38D4E341D7A0}"/>
+                <a16:creationId xmlns:a16="http://schemas.microsoft.com/office/drawing/2014/main" id="{5EA1110F-CC20-0422-9FC6-372BC1A25854}"/>
               </a:ext>
             </a:extLst>
           </p:cNvPr>
@@ -4175,7 +4574,850 @@
         </p:nvSpPr>
         <p:spPr>
           <a:xfrm>
-            <a:off x="294210" y="385084"/>
+            <a:off x="3461066" y="2967335"/>
+            <a:ext cx="4301049" cy="830997"/>
+          </a:xfrm>
+          <a:prstGeom prst="rect">
+            <a:avLst/>
+          </a:prstGeom>
+          <a:noFill/>
+        </p:spPr>
+        <p:txBody>
+          <a:bodyPr wrap="none" rtlCol="0">
+            <a:spAutoFit/>
+          </a:bodyPr>
+          <a:lstStyle/>
+          <a:p>
+            <a:pPr algn="ctr"/>
+            <a:r>
+              <a:rPr lang="en-US" sz="2400" dirty="0">
+                <a:solidFill>
+                  <a:schemeClr val="accent6">
+                    <a:lumMod val="60000"/>
+                    <a:lumOff val="40000"/>
+                  </a:schemeClr>
+                </a:solidFill>
+              </a:rPr>
+              <a:t>Then  I ran the </a:t>
+            </a:r>
+            <a:r>
+              <a:rPr lang="en-US" sz="2400" dirty="0" err="1">
+                <a:solidFill>
+                  <a:schemeClr val="accent6">
+                    <a:lumMod val="60000"/>
+                    <a:lumOff val="40000"/>
+                  </a:schemeClr>
+                </a:solidFill>
+              </a:rPr>
+              <a:t>jupyter</a:t>
+            </a:r>
+            <a:r>
+              <a:rPr lang="en-US" sz="2400" dirty="0">
+                <a:solidFill>
+                  <a:schemeClr val="accent6">
+                    <a:lumMod val="60000"/>
+                    <a:lumOff val="40000"/>
+                  </a:schemeClr>
+                </a:solidFill>
+              </a:rPr>
+              <a:t> notebook </a:t>
+            </a:r>
+          </a:p>
+          <a:p>
+            <a:pPr algn="ctr"/>
+            <a:r>
+              <a:rPr lang="en-US" sz="2400" dirty="0" err="1">
+                <a:solidFill>
+                  <a:schemeClr val="accent6">
+                    <a:lumMod val="60000"/>
+                    <a:lumOff val="40000"/>
+                  </a:schemeClr>
+                </a:solidFill>
+              </a:rPr>
+              <a:t>FT_OpenAI_Models.ipynb</a:t>
+            </a:r>
+            <a:endParaRPr lang="en-US" sz="2400" dirty="0">
+              <a:solidFill>
+                <a:schemeClr val="accent6">
+                  <a:lumMod val="60000"/>
+                  <a:lumOff val="40000"/>
+                </a:schemeClr>
+              </a:solidFill>
+            </a:endParaRPr>
+          </a:p>
+        </p:txBody>
+      </p:sp>
+    </p:spTree>
+    <p:extLst>
+      <p:ext uri="{BB962C8B-B14F-4D97-AF65-F5344CB8AC3E}">
+        <p14:creationId xmlns:p14="http://schemas.microsoft.com/office/powerpoint/2010/main" val="4059099657"/>
+      </p:ext>
+    </p:extLst>
+  </p:cSld>
+  <p:clrMapOvr>
+    <a:masterClrMapping/>
+  </p:clrMapOvr>
+</p:sld>
+</file>
+
+<file path=ppt/slides/slide11.xml><?xml version="1.0" encoding="utf-8"?>
+<p:sld xmlns:a="http://schemas.openxmlformats.org/drawingml/2006/main" xmlns:r="http://schemas.openxmlformats.org/officeDocument/2006/relationships" xmlns:p="http://schemas.openxmlformats.org/presentationml/2006/main">
+  <p:cSld>
+    <p:spTree>
+      <p:nvGrpSpPr>
+        <p:cNvPr id="1" name="">
+          <a:extLst>
+            <a:ext uri="{FF2B5EF4-FFF2-40B4-BE49-F238E27FC236}">
+              <a16:creationId xmlns:a16="http://schemas.microsoft.com/office/drawing/2014/main" id="{30AB3ECB-DF21-F95E-EDDA-9598BCB220B2}"/>
+            </a:ext>
+          </a:extLst>
+        </p:cNvPr>
+        <p:cNvGrpSpPr/>
+        <p:nvPr/>
+      </p:nvGrpSpPr>
+      <p:grpSpPr>
+        <a:xfrm>
+          <a:off x="0" y="0"/>
+          <a:ext cx="0" cy="0"/>
+          <a:chOff x="0" y="0"/>
+          <a:chExt cx="0" cy="0"/>
+        </a:xfrm>
+      </p:grpSpPr>
+      <p:sp>
+        <p:nvSpPr>
+          <p:cNvPr id="2" name="TextBox 1">
+            <a:extLst>
+              <a:ext uri="{FF2B5EF4-FFF2-40B4-BE49-F238E27FC236}">
+                <a16:creationId xmlns:a16="http://schemas.microsoft.com/office/drawing/2014/main" id="{3BE0F9F6-4698-5533-8B47-E467B28981C6}"/>
+              </a:ext>
+            </a:extLst>
+          </p:cNvPr>
+          <p:cNvSpPr txBox="1"/>
+          <p:nvPr/>
+        </p:nvSpPr>
+        <p:spPr>
+          <a:xfrm>
+            <a:off x="897234" y="273093"/>
+            <a:ext cx="4362926" cy="461665"/>
+          </a:xfrm>
+          <a:prstGeom prst="rect">
+            <a:avLst/>
+          </a:prstGeom>
+          <a:noFill/>
+        </p:spPr>
+        <p:txBody>
+          <a:bodyPr wrap="none" rtlCol="0">
+            <a:spAutoFit/>
+          </a:bodyPr>
+          <a:lstStyle/>
+          <a:p>
+            <a:pPr algn="ctr"/>
+            <a:r>
+              <a:rPr lang="en-US" sz="2400" dirty="0">
+                <a:solidFill>
+                  <a:schemeClr val="accent6">
+                    <a:lumMod val="60000"/>
+                    <a:lumOff val="40000"/>
+                  </a:schemeClr>
+                </a:solidFill>
+              </a:rPr>
+              <a:t>After Fine tuned model is created</a:t>
+            </a:r>
+          </a:p>
+        </p:txBody>
+      </p:sp>
+      <p:pic>
+        <p:nvPicPr>
+          <p:cNvPr id="9" name="Picture 8">
+            <a:extLst>
+              <a:ext uri="{FF2B5EF4-FFF2-40B4-BE49-F238E27FC236}">
+                <a16:creationId xmlns:a16="http://schemas.microsoft.com/office/drawing/2014/main" id="{85832834-2EEC-AAC4-B50A-CAA44AAA37A8}"/>
+              </a:ext>
+            </a:extLst>
+          </p:cNvPr>
+          <p:cNvPicPr>
+            <a:picLocks noChangeAspect="1"/>
+          </p:cNvPicPr>
+          <p:nvPr/>
+        </p:nvPicPr>
+        <p:blipFill>
+          <a:blip r:embed="rId2"/>
+          <a:stretch>
+            <a:fillRect/>
+          </a:stretch>
+        </p:blipFill>
+        <p:spPr>
+          <a:xfrm>
+            <a:off x="256032" y="1132986"/>
+            <a:ext cx="11497056" cy="5451921"/>
+          </a:xfrm>
+          <a:prstGeom prst="rect">
+            <a:avLst/>
+          </a:prstGeom>
+        </p:spPr>
+      </p:pic>
+      <mc:AlternateContent xmlns:mc="http://schemas.openxmlformats.org/markup-compatibility/2006">
+        <mc:Choice xmlns:p14="http://schemas.microsoft.com/office/powerpoint/2010/main" Requires="p14">
+          <p:contentPart p14:bwMode="auto" r:id="rId3">
+            <p14:nvContentPartPr>
+              <p14:cNvPr id="3" name="Ink 2">
+                <a:extLst>
+                  <a:ext uri="{FF2B5EF4-FFF2-40B4-BE49-F238E27FC236}">
+                    <a16:creationId xmlns:a16="http://schemas.microsoft.com/office/drawing/2014/main" id="{2426B2FB-2855-F345-8495-91C5A66C289E}"/>
+                  </a:ext>
+                </a:extLst>
+              </p14:cNvPr>
+              <p14:cNvContentPartPr/>
+              <p14:nvPr/>
+            </p14:nvContentPartPr>
+            <p14:xfrm>
+              <a:off x="7790544" y="3533616"/>
+              <a:ext cx="198720" cy="113760"/>
+            </p14:xfrm>
+          </p:contentPart>
+        </mc:Choice>
+        <mc:Fallback>
+          <p:pic>
+            <p:nvPicPr>
+              <p:cNvPr id="3" name="Ink 2">
+                <a:extLst>
+                  <a:ext uri="{FF2B5EF4-FFF2-40B4-BE49-F238E27FC236}">
+                    <a16:creationId xmlns:a16="http://schemas.microsoft.com/office/drawing/2014/main" id="{2426B2FB-2855-F345-8495-91C5A66C289E}"/>
+                  </a:ext>
+                </a:extLst>
+              </p:cNvPr>
+              <p:cNvPicPr/>
+              <p:nvPr/>
+            </p:nvPicPr>
+            <p:blipFill>
+              <a:blip r:embed="rId4"/>
+              <a:stretch>
+                <a:fillRect/>
+              </a:stretch>
+            </p:blipFill>
+            <p:spPr>
+              <a:xfrm>
+                <a:off x="7754904" y="3497616"/>
+                <a:ext cx="270360" cy="185400"/>
+              </a:xfrm>
+              <a:prstGeom prst="rect">
+                <a:avLst/>
+              </a:prstGeom>
+            </p:spPr>
+          </p:pic>
+        </mc:Fallback>
+      </mc:AlternateContent>
+      <mc:AlternateContent xmlns:mc="http://schemas.openxmlformats.org/markup-compatibility/2006">
+        <mc:Choice xmlns:p14="http://schemas.microsoft.com/office/powerpoint/2010/main" Requires="p14">
+          <p:contentPart p14:bwMode="auto" r:id="rId5">
+            <p14:nvContentPartPr>
+              <p14:cNvPr id="4" name="Ink 3">
+                <a:extLst>
+                  <a:ext uri="{FF2B5EF4-FFF2-40B4-BE49-F238E27FC236}">
+                    <a16:creationId xmlns:a16="http://schemas.microsoft.com/office/drawing/2014/main" id="{85FBA09E-E266-2508-F553-D46B76B7A6F3}"/>
+                  </a:ext>
+                </a:extLst>
+              </p14:cNvPr>
+              <p14:cNvContentPartPr/>
+              <p14:nvPr/>
+            </p14:nvContentPartPr>
+            <p14:xfrm>
+              <a:off x="8503704" y="3727296"/>
+              <a:ext cx="560880" cy="227880"/>
+            </p14:xfrm>
+          </p:contentPart>
+        </mc:Choice>
+        <mc:Fallback>
+          <p:pic>
+            <p:nvPicPr>
+              <p:cNvPr id="4" name="Ink 3">
+                <a:extLst>
+                  <a:ext uri="{FF2B5EF4-FFF2-40B4-BE49-F238E27FC236}">
+                    <a16:creationId xmlns:a16="http://schemas.microsoft.com/office/drawing/2014/main" id="{85FBA09E-E266-2508-F553-D46B76B7A6F3}"/>
+                  </a:ext>
+                </a:extLst>
+              </p:cNvPr>
+              <p:cNvPicPr/>
+              <p:nvPr/>
+            </p:nvPicPr>
+            <p:blipFill>
+              <a:blip r:embed="rId6"/>
+              <a:stretch>
+                <a:fillRect/>
+              </a:stretch>
+            </p:blipFill>
+            <p:spPr>
+              <a:xfrm>
+                <a:off x="8467704" y="3691296"/>
+                <a:ext cx="632520" cy="299520"/>
+              </a:xfrm>
+              <a:prstGeom prst="rect">
+                <a:avLst/>
+              </a:prstGeom>
+            </p:spPr>
+          </p:pic>
+        </mc:Fallback>
+      </mc:AlternateContent>
+      <mc:AlternateContent xmlns:mc="http://schemas.openxmlformats.org/markup-compatibility/2006">
+        <mc:Choice xmlns:p14="http://schemas.microsoft.com/office/powerpoint/2010/main" Requires="p14">
+          <p:contentPart p14:bwMode="auto" r:id="rId7">
+            <p14:nvContentPartPr>
+              <p14:cNvPr id="5" name="Ink 4">
+                <a:extLst>
+                  <a:ext uri="{FF2B5EF4-FFF2-40B4-BE49-F238E27FC236}">
+                    <a16:creationId xmlns:a16="http://schemas.microsoft.com/office/drawing/2014/main" id="{395BAC7C-0831-2C58-03F2-76A348F66738}"/>
+                  </a:ext>
+                </a:extLst>
+              </p14:cNvPr>
+              <p14:cNvContentPartPr/>
+              <p14:nvPr/>
+            </p14:nvContentPartPr>
+            <p14:xfrm>
+              <a:off x="8330184" y="4366656"/>
+              <a:ext cx="353520" cy="128880"/>
+            </p14:xfrm>
+          </p:contentPart>
+        </mc:Choice>
+        <mc:Fallback>
+          <p:pic>
+            <p:nvPicPr>
+              <p:cNvPr id="5" name="Ink 4">
+                <a:extLst>
+                  <a:ext uri="{FF2B5EF4-FFF2-40B4-BE49-F238E27FC236}">
+                    <a16:creationId xmlns:a16="http://schemas.microsoft.com/office/drawing/2014/main" id="{395BAC7C-0831-2C58-03F2-76A348F66738}"/>
+                  </a:ext>
+                </a:extLst>
+              </p:cNvPr>
+              <p:cNvPicPr/>
+              <p:nvPr/>
+            </p:nvPicPr>
+            <p:blipFill>
+              <a:blip r:embed="rId8"/>
+              <a:stretch>
+                <a:fillRect/>
+              </a:stretch>
+            </p:blipFill>
+            <p:spPr>
+              <a:xfrm>
+                <a:off x="8294184" y="4331016"/>
+                <a:ext cx="425160" cy="200520"/>
+              </a:xfrm>
+              <a:prstGeom prst="rect">
+                <a:avLst/>
+              </a:prstGeom>
+            </p:spPr>
+          </p:pic>
+        </mc:Fallback>
+      </mc:AlternateContent>
+      <mc:AlternateContent xmlns:mc="http://schemas.openxmlformats.org/markup-compatibility/2006">
+        <mc:Choice xmlns:p14="http://schemas.microsoft.com/office/powerpoint/2010/main" Requires="p14">
+          <p:contentPart p14:bwMode="auto" r:id="rId9">
+            <p14:nvContentPartPr>
+              <p14:cNvPr id="6" name="Ink 5">
+                <a:extLst>
+                  <a:ext uri="{FF2B5EF4-FFF2-40B4-BE49-F238E27FC236}">
+                    <a16:creationId xmlns:a16="http://schemas.microsoft.com/office/drawing/2014/main" id="{DF227A43-5C31-F872-D426-ED99CCDE44E3}"/>
+                  </a:ext>
+                </a:extLst>
+              </p14:cNvPr>
+              <p14:cNvContentPartPr/>
+              <p14:nvPr/>
+            </p14:nvContentPartPr>
+            <p14:xfrm>
+              <a:off x="7434144" y="4777776"/>
+              <a:ext cx="511920" cy="250920"/>
+            </p14:xfrm>
+          </p:contentPart>
+        </mc:Choice>
+        <mc:Fallback>
+          <p:pic>
+            <p:nvPicPr>
+              <p:cNvPr id="6" name="Ink 5">
+                <a:extLst>
+                  <a:ext uri="{FF2B5EF4-FFF2-40B4-BE49-F238E27FC236}">
+                    <a16:creationId xmlns:a16="http://schemas.microsoft.com/office/drawing/2014/main" id="{DF227A43-5C31-F872-D426-ED99CCDE44E3}"/>
+                  </a:ext>
+                </a:extLst>
+              </p:cNvPr>
+              <p:cNvPicPr/>
+              <p:nvPr/>
+            </p:nvPicPr>
+            <p:blipFill>
+              <a:blip r:embed="rId10"/>
+              <a:stretch>
+                <a:fillRect/>
+              </a:stretch>
+            </p:blipFill>
+            <p:spPr>
+              <a:xfrm>
+                <a:off x="7398144" y="4741776"/>
+                <a:ext cx="583560" cy="322560"/>
+              </a:xfrm>
+              <a:prstGeom prst="rect">
+                <a:avLst/>
+              </a:prstGeom>
+            </p:spPr>
+          </p:pic>
+        </mc:Fallback>
+      </mc:AlternateContent>
+    </p:spTree>
+    <p:extLst>
+      <p:ext uri="{BB962C8B-B14F-4D97-AF65-F5344CB8AC3E}">
+        <p14:creationId xmlns:p14="http://schemas.microsoft.com/office/powerpoint/2010/main" val="2622131509"/>
+      </p:ext>
+    </p:extLst>
+  </p:cSld>
+  <p:clrMapOvr>
+    <a:masterClrMapping/>
+  </p:clrMapOvr>
+</p:sld>
+</file>
+
+<file path=ppt/slides/slide12.xml><?xml version="1.0" encoding="utf-8"?>
+<p:sld xmlns:a="http://schemas.openxmlformats.org/drawingml/2006/main" xmlns:r="http://schemas.openxmlformats.org/officeDocument/2006/relationships" xmlns:p="http://schemas.openxmlformats.org/presentationml/2006/main">
+  <p:cSld>
+    <p:spTree>
+      <p:nvGrpSpPr>
+        <p:cNvPr id="1" name="">
+          <a:extLst>
+            <a:ext uri="{FF2B5EF4-FFF2-40B4-BE49-F238E27FC236}">
+              <a16:creationId xmlns:a16="http://schemas.microsoft.com/office/drawing/2014/main" id="{3ACBE9D0-C34C-ECD3-1A44-0135B2F9BF0D}"/>
+            </a:ext>
+          </a:extLst>
+        </p:cNvPr>
+        <p:cNvGrpSpPr/>
+        <p:nvPr/>
+      </p:nvGrpSpPr>
+      <p:grpSpPr>
+        <a:xfrm>
+          <a:off x="0" y="0"/>
+          <a:ext cx="0" cy="0"/>
+          <a:chOff x="0" y="0"/>
+          <a:chExt cx="0" cy="0"/>
+        </a:xfrm>
+      </p:grpSpPr>
+      <p:sp>
+        <p:nvSpPr>
+          <p:cNvPr id="2" name="TextBox 1">
+            <a:extLst>
+              <a:ext uri="{FF2B5EF4-FFF2-40B4-BE49-F238E27FC236}">
+                <a16:creationId xmlns:a16="http://schemas.microsoft.com/office/drawing/2014/main" id="{45E4F3DB-2A18-C085-A8CF-F8AB18573933}"/>
+              </a:ext>
+            </a:extLst>
+          </p:cNvPr>
+          <p:cNvSpPr txBox="1"/>
+          <p:nvPr/>
+        </p:nvSpPr>
+        <p:spPr>
+          <a:xfrm>
+            <a:off x="1287163" y="227373"/>
+            <a:ext cx="8100231" cy="461665"/>
+          </a:xfrm>
+          <a:prstGeom prst="rect">
+            <a:avLst/>
+          </a:prstGeom>
+          <a:noFill/>
+        </p:spPr>
+        <p:txBody>
+          <a:bodyPr wrap="none" rtlCol="0">
+            <a:spAutoFit/>
+          </a:bodyPr>
+          <a:lstStyle/>
+          <a:p>
+            <a:pPr algn="ctr"/>
+            <a:r>
+              <a:rPr lang="en-US" sz="2400" dirty="0">
+                <a:solidFill>
+                  <a:schemeClr val="accent6">
+                    <a:lumMod val="60000"/>
+                    <a:lumOff val="40000"/>
+                  </a:schemeClr>
+                </a:solidFill>
+              </a:rPr>
+              <a:t>Then I went to Open AI playground to view chat with the model</a:t>
+            </a:r>
+          </a:p>
+        </p:txBody>
+      </p:sp>
+      <p:pic>
+        <p:nvPicPr>
+          <p:cNvPr id="8" name="Picture 7">
+            <a:extLst>
+              <a:ext uri="{FF2B5EF4-FFF2-40B4-BE49-F238E27FC236}">
+                <a16:creationId xmlns:a16="http://schemas.microsoft.com/office/drawing/2014/main" id="{958322DC-0E48-BBDD-CBB3-EA2063E0333E}"/>
+              </a:ext>
+            </a:extLst>
+          </p:cNvPr>
+          <p:cNvPicPr>
+            <a:picLocks noChangeAspect="1"/>
+          </p:cNvPicPr>
+          <p:nvPr/>
+        </p:nvPicPr>
+        <p:blipFill>
+          <a:blip r:embed="rId2"/>
+          <a:stretch>
+            <a:fillRect/>
+          </a:stretch>
+        </p:blipFill>
+        <p:spPr>
+          <a:xfrm>
+            <a:off x="484632" y="958155"/>
+            <a:ext cx="11067288" cy="5582124"/>
+          </a:xfrm>
+          <a:prstGeom prst="rect">
+            <a:avLst/>
+          </a:prstGeom>
+        </p:spPr>
+      </p:pic>
+      <mc:AlternateContent xmlns:mc="http://schemas.openxmlformats.org/markup-compatibility/2006">
+        <mc:Choice xmlns:p14="http://schemas.microsoft.com/office/powerpoint/2010/main" Requires="p14">
+          <p:contentPart p14:bwMode="auto" r:id="rId3">
+            <p14:nvContentPartPr>
+              <p14:cNvPr id="10" name="Ink 9">
+                <a:extLst>
+                  <a:ext uri="{FF2B5EF4-FFF2-40B4-BE49-F238E27FC236}">
+                    <a16:creationId xmlns:a16="http://schemas.microsoft.com/office/drawing/2014/main" id="{7A6F3122-647F-F92E-A6CB-8C14224764B4}"/>
+                  </a:ext>
+                </a:extLst>
+              </p14:cNvPr>
+              <p14:cNvContentPartPr/>
+              <p14:nvPr/>
+            </p14:nvContentPartPr>
+            <p14:xfrm>
+              <a:off x="10103904" y="6115896"/>
+              <a:ext cx="373320" cy="346680"/>
+            </p14:xfrm>
+          </p:contentPart>
+        </mc:Choice>
+        <mc:Fallback>
+          <p:pic>
+            <p:nvPicPr>
+              <p:cNvPr id="10" name="Ink 9">
+                <a:extLst>
+                  <a:ext uri="{FF2B5EF4-FFF2-40B4-BE49-F238E27FC236}">
+                    <a16:creationId xmlns:a16="http://schemas.microsoft.com/office/drawing/2014/main" id="{7A6F3122-647F-F92E-A6CB-8C14224764B4}"/>
+                  </a:ext>
+                </a:extLst>
+              </p:cNvPr>
+              <p:cNvPicPr/>
+              <p:nvPr/>
+            </p:nvPicPr>
+            <p:blipFill>
+              <a:blip r:embed="rId4"/>
+              <a:stretch>
+                <a:fillRect/>
+              </a:stretch>
+            </p:blipFill>
+            <p:spPr>
+              <a:xfrm>
+                <a:off x="10067904" y="6079896"/>
+                <a:ext cx="444960" cy="418320"/>
+              </a:xfrm>
+              <a:prstGeom prst="rect">
+                <a:avLst/>
+              </a:prstGeom>
+            </p:spPr>
+          </p:pic>
+        </mc:Fallback>
+      </mc:AlternateContent>
+    </p:spTree>
+    <p:extLst>
+      <p:ext uri="{BB962C8B-B14F-4D97-AF65-F5344CB8AC3E}">
+        <p14:creationId xmlns:p14="http://schemas.microsoft.com/office/powerpoint/2010/main" val="2876302974"/>
+      </p:ext>
+    </p:extLst>
+  </p:cSld>
+  <p:clrMapOvr>
+    <a:masterClrMapping/>
+  </p:clrMapOvr>
+</p:sld>
+</file>
+
+<file path=ppt/slides/slide13.xml><?xml version="1.0" encoding="utf-8"?>
+<p:sld xmlns:a="http://schemas.openxmlformats.org/drawingml/2006/main" xmlns:r="http://schemas.openxmlformats.org/officeDocument/2006/relationships" xmlns:p="http://schemas.openxmlformats.org/presentationml/2006/main">
+  <p:cSld>
+    <p:spTree>
+      <p:nvGrpSpPr>
+        <p:cNvPr id="1" name="">
+          <a:extLst>
+            <a:ext uri="{FF2B5EF4-FFF2-40B4-BE49-F238E27FC236}">
+              <a16:creationId xmlns:a16="http://schemas.microsoft.com/office/drawing/2014/main" id="{416B5997-38DB-371A-2AFF-C2A0B75523BF}"/>
+            </a:ext>
+          </a:extLst>
+        </p:cNvPr>
+        <p:cNvGrpSpPr/>
+        <p:nvPr/>
+      </p:nvGrpSpPr>
+      <p:grpSpPr>
+        <a:xfrm>
+          <a:off x="0" y="0"/>
+          <a:ext cx="0" cy="0"/>
+          <a:chOff x="0" y="0"/>
+          <a:chExt cx="0" cy="0"/>
+        </a:xfrm>
+      </p:grpSpPr>
+      <p:sp>
+        <p:nvSpPr>
+          <p:cNvPr id="2" name="TextBox 1">
+            <a:extLst>
+              <a:ext uri="{FF2B5EF4-FFF2-40B4-BE49-F238E27FC236}">
+                <a16:creationId xmlns:a16="http://schemas.microsoft.com/office/drawing/2014/main" id="{E87CDA49-6464-FA5D-B443-8DE7C9A6DEE1}"/>
+              </a:ext>
+            </a:extLst>
+          </p:cNvPr>
+          <p:cNvSpPr txBox="1"/>
+          <p:nvPr/>
+        </p:nvSpPr>
+        <p:spPr>
+          <a:xfrm>
+            <a:off x="1162267" y="78714"/>
+            <a:ext cx="6027419" cy="461665"/>
+          </a:xfrm>
+          <a:prstGeom prst="rect">
+            <a:avLst/>
+          </a:prstGeom>
+          <a:noFill/>
+        </p:spPr>
+        <p:txBody>
+          <a:bodyPr wrap="none" rtlCol="0">
+            <a:spAutoFit/>
+          </a:bodyPr>
+          <a:lstStyle/>
+          <a:p>
+            <a:pPr algn="ctr"/>
+            <a:r>
+              <a:rPr lang="en-US" sz="2400" dirty="0">
+                <a:solidFill>
+                  <a:schemeClr val="accent6">
+                    <a:lumMod val="60000"/>
+                    <a:lumOff val="40000"/>
+                  </a:schemeClr>
+                </a:solidFill>
+              </a:rPr>
+              <a:t>Playground -&gt; Chat with your fine-tuned model</a:t>
+            </a:r>
+          </a:p>
+        </p:txBody>
+      </p:sp>
+      <p:pic>
+        <p:nvPicPr>
+          <p:cNvPr id="4" name="Picture 3">
+            <a:extLst>
+              <a:ext uri="{FF2B5EF4-FFF2-40B4-BE49-F238E27FC236}">
+                <a16:creationId xmlns:a16="http://schemas.microsoft.com/office/drawing/2014/main" id="{7B33EBE4-6DA2-F200-1F48-A31DDBD45607}"/>
+              </a:ext>
+            </a:extLst>
+          </p:cNvPr>
+          <p:cNvPicPr>
+            <a:picLocks noChangeAspect="1"/>
+          </p:cNvPicPr>
+          <p:nvPr/>
+        </p:nvPicPr>
+        <p:blipFill>
+          <a:blip r:embed="rId2"/>
+          <a:stretch>
+            <a:fillRect/>
+          </a:stretch>
+        </p:blipFill>
+        <p:spPr>
+          <a:xfrm>
+            <a:off x="152218" y="1036854"/>
+            <a:ext cx="11317405" cy="5742432"/>
+          </a:xfrm>
+          <a:prstGeom prst="rect">
+            <a:avLst/>
+          </a:prstGeom>
+        </p:spPr>
+      </p:pic>
+      <mc:AlternateContent xmlns:mc="http://schemas.openxmlformats.org/markup-compatibility/2006">
+        <mc:Choice xmlns:p14="http://schemas.microsoft.com/office/powerpoint/2010/main" Requires="p14">
+          <p:contentPart p14:bwMode="auto" r:id="rId3">
+            <p14:nvContentPartPr>
+              <p14:cNvPr id="3" name="Ink 2">
+                <a:extLst>
+                  <a:ext uri="{FF2B5EF4-FFF2-40B4-BE49-F238E27FC236}">
+                    <a16:creationId xmlns:a16="http://schemas.microsoft.com/office/drawing/2014/main" id="{3694DC74-1393-082B-496C-1EA112FA992C}"/>
+                  </a:ext>
+                </a:extLst>
+              </p14:cNvPr>
+              <p14:cNvContentPartPr/>
+              <p14:nvPr/>
+            </p14:nvContentPartPr>
+            <p14:xfrm>
+              <a:off x="5594904" y="2311056"/>
+              <a:ext cx="495000" cy="671400"/>
+            </p14:xfrm>
+          </p:contentPart>
+        </mc:Choice>
+        <mc:Fallback>
+          <p:pic>
+            <p:nvPicPr>
+              <p:cNvPr id="3" name="Ink 2">
+                <a:extLst>
+                  <a:ext uri="{FF2B5EF4-FFF2-40B4-BE49-F238E27FC236}">
+                    <a16:creationId xmlns:a16="http://schemas.microsoft.com/office/drawing/2014/main" id="{3694DC74-1393-082B-496C-1EA112FA992C}"/>
+                  </a:ext>
+                </a:extLst>
+              </p:cNvPr>
+              <p:cNvPicPr/>
+              <p:nvPr/>
+            </p:nvPicPr>
+            <p:blipFill>
+              <a:blip r:embed="rId4"/>
+              <a:stretch>
+                <a:fillRect/>
+              </a:stretch>
+            </p:blipFill>
+            <p:spPr>
+              <a:xfrm>
+                <a:off x="5577264" y="2293056"/>
+                <a:ext cx="530640" cy="707040"/>
+              </a:xfrm>
+              <a:prstGeom prst="rect">
+                <a:avLst/>
+              </a:prstGeom>
+            </p:spPr>
+          </p:pic>
+        </mc:Fallback>
+      </mc:AlternateContent>
+      <mc:AlternateContent xmlns:mc="http://schemas.openxmlformats.org/markup-compatibility/2006">
+        <mc:Choice xmlns:p14="http://schemas.microsoft.com/office/powerpoint/2010/main" Requires="p14">
+          <p:contentPart p14:bwMode="auto" r:id="rId5">
+            <p14:nvContentPartPr>
+              <p14:cNvPr id="7" name="Ink 6">
+                <a:extLst>
+                  <a:ext uri="{FF2B5EF4-FFF2-40B4-BE49-F238E27FC236}">
+                    <a16:creationId xmlns:a16="http://schemas.microsoft.com/office/drawing/2014/main" id="{68598DC9-C5D3-138B-98DE-B2571732273E}"/>
+                  </a:ext>
+                </a:extLst>
+              </p14:cNvPr>
+              <p14:cNvContentPartPr/>
+              <p14:nvPr/>
+            </p14:nvContentPartPr>
+            <p14:xfrm>
+              <a:off x="5723424" y="3355776"/>
+              <a:ext cx="299880" cy="1182240"/>
+            </p14:xfrm>
+          </p:contentPart>
+        </mc:Choice>
+        <mc:Fallback>
+          <p:pic>
+            <p:nvPicPr>
+              <p:cNvPr id="7" name="Ink 6">
+                <a:extLst>
+                  <a:ext uri="{FF2B5EF4-FFF2-40B4-BE49-F238E27FC236}">
+                    <a16:creationId xmlns:a16="http://schemas.microsoft.com/office/drawing/2014/main" id="{68598DC9-C5D3-138B-98DE-B2571732273E}"/>
+                  </a:ext>
+                </a:extLst>
+              </p:cNvPr>
+              <p:cNvPicPr/>
+              <p:nvPr/>
+            </p:nvPicPr>
+            <p:blipFill>
+              <a:blip r:embed="rId6"/>
+              <a:stretch>
+                <a:fillRect/>
+              </a:stretch>
+            </p:blipFill>
+            <p:spPr>
+              <a:xfrm>
+                <a:off x="5705424" y="3337776"/>
+                <a:ext cx="335520" cy="1217880"/>
+              </a:xfrm>
+              <a:prstGeom prst="rect">
+                <a:avLst/>
+              </a:prstGeom>
+            </p:spPr>
+          </p:pic>
+        </mc:Fallback>
+      </mc:AlternateContent>
+    </p:spTree>
+    <p:extLst>
+      <p:ext uri="{BB962C8B-B14F-4D97-AF65-F5344CB8AC3E}">
+        <p14:creationId xmlns:p14="http://schemas.microsoft.com/office/powerpoint/2010/main" val="908214078"/>
+      </p:ext>
+    </p:extLst>
+  </p:cSld>
+  <p:clrMapOvr>
+    <a:masterClrMapping/>
+  </p:clrMapOvr>
+</p:sld>
+</file>
+
+<file path=ppt/slides/slide14.xml><?xml version="1.0" encoding="utf-8"?>
+<p:sld xmlns:a="http://schemas.openxmlformats.org/drawingml/2006/main" xmlns:r="http://schemas.openxmlformats.org/officeDocument/2006/relationships" xmlns:p="http://schemas.openxmlformats.org/presentationml/2006/main">
+  <p:cSld>
+    <p:spTree>
+      <p:nvGrpSpPr>
+        <p:cNvPr id="1" name="">
+          <a:extLst>
+            <a:ext uri="{FF2B5EF4-FFF2-40B4-BE49-F238E27FC236}">
+              <a16:creationId xmlns:a16="http://schemas.microsoft.com/office/drawing/2014/main" id="{EEBECFA4-2524-938D-31D5-098A85E10342}"/>
+            </a:ext>
+          </a:extLst>
+        </p:cNvPr>
+        <p:cNvGrpSpPr/>
+        <p:nvPr/>
+      </p:nvGrpSpPr>
+      <p:grpSpPr>
+        <a:xfrm>
+          <a:off x="0" y="0"/>
+          <a:ext cx="0" cy="0"/>
+          <a:chOff x="0" y="0"/>
+          <a:chExt cx="0" cy="0"/>
+        </a:xfrm>
+      </p:grpSpPr>
+    </p:spTree>
+    <p:extLst>
+      <p:ext uri="{BB962C8B-B14F-4D97-AF65-F5344CB8AC3E}">
+        <p14:creationId xmlns:p14="http://schemas.microsoft.com/office/powerpoint/2010/main" val="2684895119"/>
+      </p:ext>
+    </p:extLst>
+  </p:cSld>
+  <p:clrMapOvr>
+    <a:masterClrMapping/>
+  </p:clrMapOvr>
+</p:sld>
+</file>
+
+<file path=ppt/slides/slide2.xml><?xml version="1.0" encoding="utf-8"?>
+<p:sld xmlns:a="http://schemas.openxmlformats.org/drawingml/2006/main" xmlns:r="http://schemas.openxmlformats.org/officeDocument/2006/relationships" xmlns:p="http://schemas.openxmlformats.org/presentationml/2006/main">
+  <p:cSld>
+    <p:spTree>
+      <p:nvGrpSpPr>
+        <p:cNvPr id="1" name="">
+          <a:extLst>
+            <a:ext uri="{FF2B5EF4-FFF2-40B4-BE49-F238E27FC236}">
+              <a16:creationId xmlns:a16="http://schemas.microsoft.com/office/drawing/2014/main" id="{7A7A4CA2-C655-80A5-EB78-76683CCACE54}"/>
+            </a:ext>
+          </a:extLst>
+        </p:cNvPr>
+        <p:cNvGrpSpPr/>
+        <p:nvPr/>
+      </p:nvGrpSpPr>
+      <p:grpSpPr>
+        <a:xfrm>
+          <a:off x="0" y="0"/>
+          <a:ext cx="0" cy="0"/>
+          <a:chOff x="0" y="0"/>
+          <a:chExt cx="0" cy="0"/>
+        </a:xfrm>
+      </p:grpSpPr>
+      <p:sp>
+        <p:nvSpPr>
+          <p:cNvPr id="3" name="TextBox 2">
+            <a:extLst>
+              <a:ext uri="{FF2B5EF4-FFF2-40B4-BE49-F238E27FC236}">
+                <a16:creationId xmlns:a16="http://schemas.microsoft.com/office/drawing/2014/main" id="{ABFC6C65-0BA4-0169-396C-38D4E341D7A0}"/>
+              </a:ext>
+            </a:extLst>
+          </p:cNvPr>
+          <p:cNvSpPr txBox="1"/>
+          <p:nvPr/>
+        </p:nvSpPr>
+        <p:spPr>
+          <a:xfrm>
+            <a:off x="312498" y="1866412"/>
             <a:ext cx="11190653" cy="1384995"/>
           </a:xfrm>
           <a:prstGeom prst="rect">
@@ -4260,12 +5502,48 @@
           </a:p>
         </p:txBody>
       </p:sp>
+    </p:spTree>
+    <p:extLst>
+      <p:ext uri="{BB962C8B-B14F-4D97-AF65-F5344CB8AC3E}">
+        <p14:creationId xmlns:p14="http://schemas.microsoft.com/office/powerpoint/2010/main" val="269874966"/>
+      </p:ext>
+    </p:extLst>
+  </p:cSld>
+  <p:clrMapOvr>
+    <a:masterClrMapping/>
+  </p:clrMapOvr>
+</p:sld>
+</file>
+
+<file path=ppt/slides/slide3.xml><?xml version="1.0" encoding="utf-8"?>
+<p:sld xmlns:a="http://schemas.openxmlformats.org/drawingml/2006/main" xmlns:r="http://schemas.openxmlformats.org/officeDocument/2006/relationships" xmlns:p="http://schemas.openxmlformats.org/presentationml/2006/main">
+  <p:cSld>
+    <p:spTree>
+      <p:nvGrpSpPr>
+        <p:cNvPr id="1" name="">
+          <a:extLst>
+            <a:ext uri="{FF2B5EF4-FFF2-40B4-BE49-F238E27FC236}">
+              <a16:creationId xmlns:a16="http://schemas.microsoft.com/office/drawing/2014/main" id="{F8713A58-C42F-7E6A-B2EA-79577F01B6AF}"/>
+            </a:ext>
+          </a:extLst>
+        </p:cNvPr>
+        <p:cNvGrpSpPr/>
+        <p:nvPr/>
+      </p:nvGrpSpPr>
+      <p:grpSpPr>
+        <a:xfrm>
+          <a:off x="0" y="0"/>
+          <a:ext cx="0" cy="0"/>
+          <a:chOff x="0" y="0"/>
+          <a:chExt cx="0" cy="0"/>
+        </a:xfrm>
+      </p:grpSpPr>
       <p:sp>
         <p:nvSpPr>
           <p:cNvPr id="4" name="TextBox 3">
             <a:extLst>
               <a:ext uri="{FF2B5EF4-FFF2-40B4-BE49-F238E27FC236}">
-                <a16:creationId xmlns:a16="http://schemas.microsoft.com/office/drawing/2014/main" id="{E54ED367-0B16-3DC4-9E42-EF6923744366}"/>
+                <a16:creationId xmlns:a16="http://schemas.microsoft.com/office/drawing/2014/main" id="{DDD6F7CE-56D5-1E8B-282A-3B0A00DA5735}"/>
               </a:ext>
             </a:extLst>
           </p:cNvPr>
@@ -4274,8 +5552,8 @@
         </p:nvSpPr>
         <p:spPr>
           <a:xfrm>
-            <a:off x="190517" y="2435858"/>
-            <a:ext cx="4034011" cy="3416320"/>
+            <a:off x="0" y="1533465"/>
+            <a:ext cx="4773684" cy="5324535"/>
           </a:xfrm>
           <a:prstGeom prst="rect">
             <a:avLst/>
@@ -4289,7 +5567,7 @@
           <a:lstStyle/>
           <a:p>
             <a:r>
-              <a:rPr lang="en-US" sz="2400" dirty="0">
+              <a:rPr lang="en-US" sz="2000" dirty="0">
                 <a:solidFill>
                   <a:schemeClr val="accent6">
                     <a:lumMod val="60000"/>
@@ -4297,7 +5575,175 @@
                   </a:schemeClr>
                 </a:solidFill>
               </a:rPr>
-              <a:t>Victoria Gupta, a 27-year-old female, presents with chronic fatigue, muscle pain, and tender points throughout body. Reports unrefreshing sleep and cognitive difficulties. Started on Duloxetine 30mg daily with gradual increase to 60mg.</a:t>
+              <a:t>You are a medical information extractor. Following is a patient data:</a:t>
+            </a:r>
+          </a:p>
+          <a:p>
+            <a:endParaRPr lang="en-US" sz="2000" dirty="0">
+              <a:solidFill>
+                <a:schemeClr val="accent6">
+                  <a:lumMod val="60000"/>
+                  <a:lumOff val="40000"/>
+                </a:schemeClr>
+              </a:solidFill>
+            </a:endParaRPr>
+          </a:p>
+          <a:p>
+            <a:r>
+              <a:rPr lang="en-US" sz="2000" dirty="0">
+                <a:solidFill>
+                  <a:schemeClr val="accent6">
+                    <a:lumMod val="60000"/>
+                    <a:lumOff val="40000"/>
+                  </a:schemeClr>
+                </a:solidFill>
+              </a:rPr>
+              <a:t>“Mr. Loxford Kumar is a 36 year of age. He is having pain  in  his gum on  left side. Possible tooth decay. Prescribed Helio 50mg daily”</a:t>
+            </a:r>
+          </a:p>
+          <a:p>
+            <a:endParaRPr lang="en-US" sz="2000" dirty="0">
+              <a:solidFill>
+                <a:schemeClr val="accent6">
+                  <a:lumMod val="60000"/>
+                  <a:lumOff val="40000"/>
+                </a:schemeClr>
+              </a:solidFill>
+            </a:endParaRPr>
+          </a:p>
+          <a:p>
+            <a:r>
+              <a:rPr lang="en-US" sz="2000" dirty="0">
+                <a:solidFill>
+                  <a:schemeClr val="accent6">
+                    <a:lumMod val="60000"/>
+                    <a:lumOff val="40000"/>
+                  </a:schemeClr>
+                </a:solidFill>
+              </a:rPr>
+              <a:t>Summarize above and produce output in strict JSON format:</a:t>
+            </a:r>
+          </a:p>
+          <a:p>
+            <a:r>
+              <a:rPr lang="en-US" sz="2000" dirty="0">
+                <a:solidFill>
+                  <a:schemeClr val="accent6">
+                    <a:lumMod val="60000"/>
+                    <a:lumOff val="40000"/>
+                  </a:schemeClr>
+                </a:solidFill>
+              </a:rPr>
+              <a:t>{ </a:t>
+            </a:r>
+          </a:p>
+          <a:p>
+            <a:r>
+              <a:rPr lang="en-US" sz="2000" dirty="0">
+                <a:solidFill>
+                  <a:schemeClr val="accent6">
+                    <a:lumMod val="60000"/>
+                    <a:lumOff val="40000"/>
+                  </a:schemeClr>
+                </a:solidFill>
+              </a:rPr>
+              <a:t>“</a:t>
+            </a:r>
+            <a:r>
+              <a:rPr lang="en-US" sz="2000" dirty="0" err="1">
+                <a:solidFill>
+                  <a:schemeClr val="accent6">
+                    <a:lumMod val="60000"/>
+                    <a:lumOff val="40000"/>
+                  </a:schemeClr>
+                </a:solidFill>
+              </a:rPr>
+              <a:t>patient_name</a:t>
+            </a:r>
+            <a:r>
+              <a:rPr lang="en-US" sz="2000" dirty="0">
+                <a:solidFill>
+                  <a:schemeClr val="accent6">
+                    <a:lumMod val="60000"/>
+                    <a:lumOff val="40000"/>
+                  </a:schemeClr>
+                </a:solidFill>
+              </a:rPr>
+              <a:t>”: &lt;patient name here&gt;,</a:t>
+            </a:r>
+          </a:p>
+          <a:p>
+            <a:r>
+              <a:rPr lang="en-US" sz="2000" dirty="0">
+                <a:solidFill>
+                  <a:schemeClr val="accent6">
+                    <a:lumMod val="60000"/>
+                    <a:lumOff val="40000"/>
+                  </a:schemeClr>
+                </a:solidFill>
+              </a:rPr>
+              <a:t>“age” : &lt;age here&gt;,</a:t>
+            </a:r>
+          </a:p>
+          <a:p>
+            <a:r>
+              <a:rPr lang="en-US" sz="2000" dirty="0">
+                <a:solidFill>
+                  <a:schemeClr val="accent6">
+                    <a:lumMod val="60000"/>
+                    <a:lumOff val="40000"/>
+                  </a:schemeClr>
+                </a:solidFill>
+              </a:rPr>
+              <a:t>“</a:t>
+            </a:r>
+            <a:r>
+              <a:rPr lang="en-US" sz="2000" dirty="0" err="1">
+                <a:solidFill>
+                  <a:schemeClr val="accent6">
+                    <a:lumMod val="60000"/>
+                    <a:lumOff val="40000"/>
+                  </a:schemeClr>
+                </a:solidFill>
+              </a:rPr>
+              <a:t>diagonsis</a:t>
+            </a:r>
+            <a:r>
+              <a:rPr lang="en-US" sz="2000" dirty="0">
+                <a:solidFill>
+                  <a:schemeClr val="accent6">
+                    <a:lumMod val="60000"/>
+                    <a:lumOff val="40000"/>
+                  </a:schemeClr>
+                </a:solidFill>
+              </a:rPr>
+              <a:t>”: “diagnosis here”,</a:t>
+            </a:r>
+          </a:p>
+          <a:p>
+            <a:r>
+              <a:rPr lang="en-US" sz="2000" dirty="0">
+                <a:solidFill>
+                  <a:schemeClr val="accent6">
+                    <a:lumMod val="60000"/>
+                    <a:lumOff val="40000"/>
+                  </a:schemeClr>
+                </a:solidFill>
+              </a:rPr>
+              <a:t>“prescribed medication”: “medication  here”</a:t>
+            </a:r>
+          </a:p>
+          <a:p>
+            <a:r>
+              <a:rPr lang="en-US" sz="2000" dirty="0">
+                <a:solidFill>
+                  <a:schemeClr val="accent6">
+                    <a:lumMod val="60000"/>
+                    <a:lumOff val="40000"/>
+                  </a:schemeClr>
+                </a:solidFill>
+              </a:rPr>
+              <a:t>}</a:t>
             </a:r>
           </a:p>
         </p:txBody>
@@ -4307,7 +5753,7 @@
           <p:cNvPr id="6" name="TextBox 5">
             <a:extLst>
               <a:ext uri="{FF2B5EF4-FFF2-40B4-BE49-F238E27FC236}">
-                <a16:creationId xmlns:a16="http://schemas.microsoft.com/office/drawing/2014/main" id="{6B3B82DC-B053-1DFD-1DE5-57AA6EC12CD7}"/>
+                <a16:creationId xmlns:a16="http://schemas.microsoft.com/office/drawing/2014/main" id="{48CA86DF-9E0D-5209-3D41-BC1445A60DEF}"/>
               </a:ext>
             </a:extLst>
           </p:cNvPr>
@@ -4352,7 +5798,7 @@
                   </a:schemeClr>
                 </a:solidFill>
               </a:rPr>
-              <a:t>"patient name": "Victoria Gupta", </a:t>
+              <a:t>"patient name": “Loxford Kumar", </a:t>
             </a:r>
           </a:p>
           <a:p>
@@ -4365,7 +5811,7 @@
                   </a:schemeClr>
                 </a:solidFill>
               </a:rPr>
-              <a:t>"age": 27, </a:t>
+              <a:t>"age": 36, </a:t>
             </a:r>
           </a:p>
           <a:p>
@@ -4378,7 +5824,7 @@
                   </a:schemeClr>
                 </a:solidFill>
               </a:rPr>
-              <a:t>"diagnosis": "fibromyalgia", </a:t>
+              <a:t>"diagnosis": "Periodontal Abscess", </a:t>
             </a:r>
           </a:p>
           <a:p>
@@ -4391,7 +5837,7 @@
                   </a:schemeClr>
                 </a:solidFill>
               </a:rPr>
-              <a:t>"prescribed medication": "Duloxetine“</a:t>
+              <a:t>"prescribed medication": “Helio”</a:t>
             </a:r>
           </a:p>
           <a:p>
@@ -4414,7 +5860,7 @@
           <p:cNvPr id="3" name="Rectangle: Rounded Corners 2">
             <a:extLst>
               <a:ext uri="{FF2B5EF4-FFF2-40B4-BE49-F238E27FC236}">
-                <a16:creationId xmlns:a16="http://schemas.microsoft.com/office/drawing/2014/main" id="{E236459D-9650-908C-4B61-3079E438849C}"/>
+                <a16:creationId xmlns:a16="http://schemas.microsoft.com/office/drawing/2014/main" id="{83B3C743-E19F-2DBC-4361-8A74E184E8E7}"/>
               </a:ext>
             </a:extLst>
           </p:cNvPr>
@@ -4452,8 +5898,8 @@
           <a:p>
             <a:pPr algn="ctr"/>
             <a:r>
-              <a:rPr lang="en-US" sz="2400" dirty="0"/>
-              <a:t>Fine Tuned</a:t>
+              <a:rPr lang="en-US" sz="2400" b="1" dirty="0"/>
+              <a:t>No Fine Tuned</a:t>
             </a:r>
           </a:p>
           <a:p>
@@ -4470,7 +5916,7 @@
           <p:cNvPr id="5" name="Arrow: Right 4">
             <a:extLst>
               <a:ext uri="{FF2B5EF4-FFF2-40B4-BE49-F238E27FC236}">
-                <a16:creationId xmlns:a16="http://schemas.microsoft.com/office/drawing/2014/main" id="{FACB062B-9A66-ADBE-F1CF-31EC2989687D}"/>
+                <a16:creationId xmlns:a16="http://schemas.microsoft.com/office/drawing/2014/main" id="{467C71E0-E027-E5C3-F9C0-C4F85FAFF58C}"/>
               </a:ext>
             </a:extLst>
           </p:cNvPr>
@@ -4516,7 +5962,7 @@
           <p:cNvPr id="7" name="Arrow: Right 6">
             <a:extLst>
               <a:ext uri="{FF2B5EF4-FFF2-40B4-BE49-F238E27FC236}">
-                <a16:creationId xmlns:a16="http://schemas.microsoft.com/office/drawing/2014/main" id="{6EF39431-45E7-BB65-47F1-C29197AECA01}"/>
+                <a16:creationId xmlns:a16="http://schemas.microsoft.com/office/drawing/2014/main" id="{C876B9C2-5FF2-741C-1992-715135DB9840}"/>
               </a:ext>
             </a:extLst>
           </p:cNvPr>
@@ -4557,6 +6003,423 @@
           </a:p>
         </p:txBody>
       </p:sp>
+      <p:sp>
+        <p:nvSpPr>
+          <p:cNvPr id="2" name="TextBox 1">
+            <a:extLst>
+              <a:ext uri="{FF2B5EF4-FFF2-40B4-BE49-F238E27FC236}">
+                <a16:creationId xmlns:a16="http://schemas.microsoft.com/office/drawing/2014/main" id="{02B246EC-9825-ACCD-5FE8-4E32EEA675EB}"/>
+              </a:ext>
+            </a:extLst>
+          </p:cNvPr>
+          <p:cNvSpPr txBox="1"/>
+          <p:nvPr/>
+        </p:nvSpPr>
+        <p:spPr>
+          <a:xfrm>
+            <a:off x="2266958" y="313132"/>
+            <a:ext cx="7599418" cy="830997"/>
+          </a:xfrm>
+          <a:prstGeom prst="rect">
+            <a:avLst/>
+          </a:prstGeom>
+          <a:noFill/>
+        </p:spPr>
+        <p:txBody>
+          <a:bodyPr wrap="square">
+            <a:spAutoFit/>
+          </a:bodyPr>
+          <a:lstStyle/>
+          <a:p>
+            <a:r>
+              <a:rPr lang="en-US" sz="2400" dirty="0">
+                <a:solidFill>
+                  <a:schemeClr val="accent6">
+                    <a:lumMod val="60000"/>
+                    <a:lumOff val="40000"/>
+                  </a:schemeClr>
+                </a:solidFill>
+              </a:rPr>
+              <a:t>Without fine tuned model, you would have to use prompt to get output in JSON format </a:t>
+            </a:r>
+          </a:p>
+        </p:txBody>
+      </p:sp>
+    </p:spTree>
+    <p:extLst>
+      <p:ext uri="{BB962C8B-B14F-4D97-AF65-F5344CB8AC3E}">
+        <p14:creationId xmlns:p14="http://schemas.microsoft.com/office/powerpoint/2010/main" val="4073404185"/>
+      </p:ext>
+    </p:extLst>
+  </p:cSld>
+  <p:clrMapOvr>
+    <a:masterClrMapping/>
+  </p:clrMapOvr>
+</p:sld>
+</file>
+
+<file path=ppt/slides/slide4.xml><?xml version="1.0" encoding="utf-8"?>
+<p:sld xmlns:a="http://schemas.openxmlformats.org/drawingml/2006/main" xmlns:r="http://schemas.openxmlformats.org/officeDocument/2006/relationships" xmlns:p="http://schemas.openxmlformats.org/presentationml/2006/main">
+  <p:cSld>
+    <p:spTree>
+      <p:nvGrpSpPr>
+        <p:cNvPr id="1" name="">
+          <a:extLst>
+            <a:ext uri="{FF2B5EF4-FFF2-40B4-BE49-F238E27FC236}">
+              <a16:creationId xmlns:a16="http://schemas.microsoft.com/office/drawing/2014/main" id="{A3FA17B0-2317-6300-05E6-CA7871758162}"/>
+            </a:ext>
+          </a:extLst>
+        </p:cNvPr>
+        <p:cNvGrpSpPr/>
+        <p:nvPr/>
+      </p:nvGrpSpPr>
+      <p:grpSpPr>
+        <a:xfrm>
+          <a:off x="0" y="0"/>
+          <a:ext cx="0" cy="0"/>
+          <a:chOff x="0" y="0"/>
+          <a:chExt cx="0" cy="0"/>
+        </a:xfrm>
+      </p:grpSpPr>
+      <p:sp>
+        <p:nvSpPr>
+          <p:cNvPr id="4" name="TextBox 3">
+            <a:extLst>
+              <a:ext uri="{FF2B5EF4-FFF2-40B4-BE49-F238E27FC236}">
+                <a16:creationId xmlns:a16="http://schemas.microsoft.com/office/drawing/2014/main" id="{E54ED367-0B16-3DC4-9E42-EF6923744366}"/>
+              </a:ext>
+            </a:extLst>
+          </p:cNvPr>
+          <p:cNvSpPr txBox="1"/>
+          <p:nvPr/>
+        </p:nvSpPr>
+        <p:spPr>
+          <a:xfrm>
+            <a:off x="190517" y="2435858"/>
+            <a:ext cx="4034011" cy="3416320"/>
+          </a:xfrm>
+          <a:prstGeom prst="rect">
+            <a:avLst/>
+          </a:prstGeom>
+          <a:noFill/>
+        </p:spPr>
+        <p:txBody>
+          <a:bodyPr wrap="square">
+            <a:spAutoFit/>
+          </a:bodyPr>
+          <a:lstStyle/>
+          <a:p>
+            <a:r>
+              <a:rPr lang="en-US" sz="2400" dirty="0">
+                <a:solidFill>
+                  <a:schemeClr val="accent6">
+                    <a:lumMod val="60000"/>
+                    <a:lumOff val="40000"/>
+                  </a:schemeClr>
+                </a:solidFill>
+              </a:rPr>
+              <a:t>Victoria Gupta, a 27-year-old female, presents with chronic fatigue, muscle pain, and tender points throughout body. Reports unrefreshing sleep and cognitive difficulties. Started on Duloxetine 30mg daily with gradual increase to 60mg.</a:t>
+            </a:r>
+          </a:p>
+        </p:txBody>
+      </p:sp>
+      <p:sp>
+        <p:nvSpPr>
+          <p:cNvPr id="6" name="TextBox 5">
+            <a:extLst>
+              <a:ext uri="{FF2B5EF4-FFF2-40B4-BE49-F238E27FC236}">
+                <a16:creationId xmlns:a16="http://schemas.microsoft.com/office/drawing/2014/main" id="{6B3B82DC-B053-1DFD-1DE5-57AA6EC12CD7}"/>
+              </a:ext>
+            </a:extLst>
+          </p:cNvPr>
+          <p:cNvSpPr txBox="1"/>
+          <p:nvPr/>
+        </p:nvSpPr>
+        <p:spPr>
+          <a:xfrm>
+            <a:off x="7150607" y="2637040"/>
+            <a:ext cx="4946905" cy="2308324"/>
+          </a:xfrm>
+          <a:prstGeom prst="rect">
+            <a:avLst/>
+          </a:prstGeom>
+          <a:noFill/>
+        </p:spPr>
+        <p:txBody>
+          <a:bodyPr wrap="square">
+            <a:spAutoFit/>
+          </a:bodyPr>
+          <a:lstStyle/>
+          <a:p>
+            <a:r>
+              <a:rPr lang="en-US" sz="2400" dirty="0">
+                <a:solidFill>
+                  <a:schemeClr val="accent6">
+                    <a:lumMod val="60000"/>
+                    <a:lumOff val="40000"/>
+                  </a:schemeClr>
+                </a:solidFill>
+              </a:rPr>
+              <a:t>{</a:t>
+            </a:r>
+          </a:p>
+          <a:p>
+            <a:r>
+              <a:rPr lang="en-US" sz="2400" dirty="0">
+                <a:solidFill>
+                  <a:schemeClr val="accent6">
+                    <a:lumMod val="60000"/>
+                    <a:lumOff val="40000"/>
+                  </a:schemeClr>
+                </a:solidFill>
+              </a:rPr>
+              <a:t>"patient name": "Victoria Gupta", </a:t>
+            </a:r>
+          </a:p>
+          <a:p>
+            <a:r>
+              <a:rPr lang="en-US" sz="2400" dirty="0">
+                <a:solidFill>
+                  <a:schemeClr val="accent6">
+                    <a:lumMod val="60000"/>
+                    <a:lumOff val="40000"/>
+                  </a:schemeClr>
+                </a:solidFill>
+              </a:rPr>
+              <a:t>"age": 27, </a:t>
+            </a:r>
+          </a:p>
+          <a:p>
+            <a:r>
+              <a:rPr lang="en-US" sz="2400" dirty="0">
+                <a:solidFill>
+                  <a:schemeClr val="accent6">
+                    <a:lumMod val="60000"/>
+                    <a:lumOff val="40000"/>
+                  </a:schemeClr>
+                </a:solidFill>
+              </a:rPr>
+              <a:t>"diagnosis": "fibromyalgia", </a:t>
+            </a:r>
+          </a:p>
+          <a:p>
+            <a:r>
+              <a:rPr lang="en-US" sz="2400" dirty="0">
+                <a:solidFill>
+                  <a:schemeClr val="accent6">
+                    <a:lumMod val="60000"/>
+                    <a:lumOff val="40000"/>
+                  </a:schemeClr>
+                </a:solidFill>
+              </a:rPr>
+              <a:t>"prescribed medication": "Duloxetine“</a:t>
+            </a:r>
+          </a:p>
+          <a:p>
+            <a:r>
+              <a:rPr lang="en-US" sz="2400" dirty="0">
+                <a:solidFill>
+                  <a:schemeClr val="accent6">
+                    <a:lumMod val="60000"/>
+                    <a:lumOff val="40000"/>
+                  </a:schemeClr>
+                </a:solidFill>
+              </a:rPr>
+              <a:t>}</a:t>
+            </a:r>
+          </a:p>
+        </p:txBody>
+      </p:sp>
+      <p:sp>
+        <p:nvSpPr>
+          <p:cNvPr id="3" name="Rectangle: Rounded Corners 2">
+            <a:extLst>
+              <a:ext uri="{FF2B5EF4-FFF2-40B4-BE49-F238E27FC236}">
+                <a16:creationId xmlns:a16="http://schemas.microsoft.com/office/drawing/2014/main" id="{E236459D-9650-908C-4B61-3079E438849C}"/>
+              </a:ext>
+            </a:extLst>
+          </p:cNvPr>
+          <p:cNvSpPr/>
+          <p:nvPr/>
+        </p:nvSpPr>
+        <p:spPr>
+          <a:xfrm>
+            <a:off x="4640062" y="3297426"/>
+            <a:ext cx="1691640" cy="1024128"/>
+          </a:xfrm>
+          <a:prstGeom prst="roundRect">
+            <a:avLst/>
+          </a:prstGeom>
+        </p:spPr>
+        <p:style>
+          <a:lnRef idx="2">
+            <a:schemeClr val="accent1">
+              <a:shade val="15000"/>
+            </a:schemeClr>
+          </a:lnRef>
+          <a:fillRef idx="1">
+            <a:schemeClr val="accent1"/>
+          </a:fillRef>
+          <a:effectRef idx="0">
+            <a:schemeClr val="accent1"/>
+          </a:effectRef>
+          <a:fontRef idx="minor">
+            <a:schemeClr val="lt1"/>
+          </a:fontRef>
+        </p:style>
+        <p:txBody>
+          <a:bodyPr rtlCol="0" anchor="ctr"/>
+          <a:lstStyle/>
+          <a:p>
+            <a:pPr algn="ctr"/>
+            <a:r>
+              <a:rPr lang="en-US" sz="2400" dirty="0"/>
+              <a:t>Fine Tuned</a:t>
+            </a:r>
+          </a:p>
+          <a:p>
+            <a:pPr algn="ctr"/>
+            <a:r>
+              <a:rPr lang="en-US" sz="2400" dirty="0"/>
+              <a:t>Model</a:t>
+            </a:r>
+          </a:p>
+        </p:txBody>
+      </p:sp>
+      <p:sp>
+        <p:nvSpPr>
+          <p:cNvPr id="5" name="Arrow: Right 4">
+            <a:extLst>
+              <a:ext uri="{FF2B5EF4-FFF2-40B4-BE49-F238E27FC236}">
+                <a16:creationId xmlns:a16="http://schemas.microsoft.com/office/drawing/2014/main" id="{FACB062B-9A66-ADBE-F1CF-31EC2989687D}"/>
+              </a:ext>
+            </a:extLst>
+          </p:cNvPr>
+          <p:cNvSpPr/>
+          <p:nvPr/>
+        </p:nvSpPr>
+        <p:spPr>
+          <a:xfrm>
+            <a:off x="4023360" y="3630168"/>
+            <a:ext cx="521208" cy="329184"/>
+          </a:xfrm>
+          <a:prstGeom prst="rightArrow">
+            <a:avLst/>
+          </a:prstGeom>
+        </p:spPr>
+        <p:style>
+          <a:lnRef idx="2">
+            <a:schemeClr val="accent1">
+              <a:shade val="15000"/>
+            </a:schemeClr>
+          </a:lnRef>
+          <a:fillRef idx="1">
+            <a:schemeClr val="accent1"/>
+          </a:fillRef>
+          <a:effectRef idx="0">
+            <a:schemeClr val="accent1"/>
+          </a:effectRef>
+          <a:fontRef idx="minor">
+            <a:schemeClr val="lt1"/>
+          </a:fontRef>
+        </p:style>
+        <p:txBody>
+          <a:bodyPr rtlCol="0" anchor="ctr"/>
+          <a:lstStyle/>
+          <a:p>
+            <a:pPr algn="ctr"/>
+            <a:endParaRPr lang="en-US"/>
+          </a:p>
+        </p:txBody>
+      </p:sp>
+      <p:sp>
+        <p:nvSpPr>
+          <p:cNvPr id="7" name="Arrow: Right 6">
+            <a:extLst>
+              <a:ext uri="{FF2B5EF4-FFF2-40B4-BE49-F238E27FC236}">
+                <a16:creationId xmlns:a16="http://schemas.microsoft.com/office/drawing/2014/main" id="{6EF39431-45E7-BB65-47F1-C29197AECA01}"/>
+              </a:ext>
+            </a:extLst>
+          </p:cNvPr>
+          <p:cNvSpPr/>
+          <p:nvPr/>
+        </p:nvSpPr>
+        <p:spPr>
+          <a:xfrm>
+            <a:off x="6427196" y="3617976"/>
+            <a:ext cx="521208" cy="329184"/>
+          </a:xfrm>
+          <a:prstGeom prst="rightArrow">
+            <a:avLst/>
+          </a:prstGeom>
+        </p:spPr>
+        <p:style>
+          <a:lnRef idx="2">
+            <a:schemeClr val="accent1">
+              <a:shade val="15000"/>
+            </a:schemeClr>
+          </a:lnRef>
+          <a:fillRef idx="1">
+            <a:schemeClr val="accent1"/>
+          </a:fillRef>
+          <a:effectRef idx="0">
+            <a:schemeClr val="accent1"/>
+          </a:effectRef>
+          <a:fontRef idx="minor">
+            <a:schemeClr val="lt1"/>
+          </a:fontRef>
+        </p:style>
+        <p:txBody>
+          <a:bodyPr rtlCol="0" anchor="ctr"/>
+          <a:lstStyle/>
+          <a:p>
+            <a:pPr algn="ctr"/>
+            <a:endParaRPr lang="en-US"/>
+          </a:p>
+        </p:txBody>
+      </p:sp>
+      <p:sp>
+        <p:nvSpPr>
+          <p:cNvPr id="8" name="TextBox 7">
+            <a:extLst>
+              <a:ext uri="{FF2B5EF4-FFF2-40B4-BE49-F238E27FC236}">
+                <a16:creationId xmlns:a16="http://schemas.microsoft.com/office/drawing/2014/main" id="{EDC95B49-82DE-268C-6B67-CE60D2133CE6}"/>
+              </a:ext>
+            </a:extLst>
+          </p:cNvPr>
+          <p:cNvSpPr txBox="1"/>
+          <p:nvPr/>
+        </p:nvSpPr>
+        <p:spPr>
+          <a:xfrm>
+            <a:off x="2266958" y="313132"/>
+            <a:ext cx="7599418" cy="461665"/>
+          </a:xfrm>
+          <a:prstGeom prst="rect">
+            <a:avLst/>
+          </a:prstGeom>
+          <a:noFill/>
+        </p:spPr>
+        <p:txBody>
+          <a:bodyPr wrap="square">
+            <a:spAutoFit/>
+          </a:bodyPr>
+          <a:lstStyle/>
+          <a:p>
+            <a:r>
+              <a:rPr lang="en-US" sz="2400" dirty="0">
+                <a:solidFill>
+                  <a:schemeClr val="accent6">
+                    <a:lumMod val="60000"/>
+                    <a:lumOff val="40000"/>
+                  </a:schemeClr>
+                </a:solidFill>
+              </a:rPr>
+              <a:t>With fine tuned model, your prompt would be simpler</a:t>
+            </a:r>
+          </a:p>
+        </p:txBody>
+      </p:sp>
     </p:spTree>
     <p:extLst>
       <p:ext uri="{BB962C8B-B14F-4D97-AF65-F5344CB8AC3E}">
@@ -4570,7 +6433,340 @@
 </p:sld>
 </file>
 
-<file path=ppt/slides/slide3.xml><?xml version="1.0" encoding="utf-8"?>
+<file path=ppt/slides/slide5.xml><?xml version="1.0" encoding="utf-8"?>
+<p:sld xmlns:a="http://schemas.openxmlformats.org/drawingml/2006/main" xmlns:r="http://schemas.openxmlformats.org/officeDocument/2006/relationships" xmlns:p="http://schemas.openxmlformats.org/presentationml/2006/main">
+  <p:cSld>
+    <p:spTree>
+      <p:nvGrpSpPr>
+        <p:cNvPr id="1" name="">
+          <a:extLst>
+            <a:ext uri="{FF2B5EF4-FFF2-40B4-BE49-F238E27FC236}">
+              <a16:creationId xmlns:a16="http://schemas.microsoft.com/office/drawing/2014/main" id="{ED61BEDA-3181-CF16-ED7E-6ED2DF17B890}"/>
+            </a:ext>
+          </a:extLst>
+        </p:cNvPr>
+        <p:cNvGrpSpPr/>
+        <p:nvPr/>
+      </p:nvGrpSpPr>
+      <p:grpSpPr>
+        <a:xfrm>
+          <a:off x="0" y="0"/>
+          <a:ext cx="0" cy="0"/>
+          <a:chOff x="0" y="0"/>
+          <a:chExt cx="0" cy="0"/>
+        </a:xfrm>
+      </p:grpSpPr>
+      <p:sp>
+        <p:nvSpPr>
+          <p:cNvPr id="4" name="TextBox 3">
+            <a:extLst>
+              <a:ext uri="{FF2B5EF4-FFF2-40B4-BE49-F238E27FC236}">
+                <a16:creationId xmlns:a16="http://schemas.microsoft.com/office/drawing/2014/main" id="{9A58694C-EA6E-8298-12EA-C74FEBC6D9DB}"/>
+              </a:ext>
+            </a:extLst>
+          </p:cNvPr>
+          <p:cNvSpPr txBox="1"/>
+          <p:nvPr/>
+        </p:nvSpPr>
+        <p:spPr>
+          <a:xfrm>
+            <a:off x="94488" y="2813072"/>
+            <a:ext cx="4034011" cy="1938992"/>
+          </a:xfrm>
+          <a:prstGeom prst="rect">
+            <a:avLst/>
+          </a:prstGeom>
+          <a:noFill/>
+        </p:spPr>
+        <p:txBody>
+          <a:bodyPr wrap="square">
+            <a:spAutoFit/>
+          </a:bodyPr>
+          <a:lstStyle/>
+          <a:p>
+            <a:r>
+              <a:rPr lang="en-US" sz="2400" dirty="0">
+                <a:solidFill>
+                  <a:schemeClr val="accent6">
+                    <a:lumMod val="60000"/>
+                    <a:lumOff val="40000"/>
+                  </a:schemeClr>
+                </a:solidFill>
+              </a:rPr>
+              <a:t>Mr. Loxford Kumar is a 36 year of age. He is having pain  in  his gum on  left side. Possible tooth decay. Prescribed Helio 50mg daily</a:t>
+            </a:r>
+          </a:p>
+        </p:txBody>
+      </p:sp>
+      <p:sp>
+        <p:nvSpPr>
+          <p:cNvPr id="6" name="TextBox 5">
+            <a:extLst>
+              <a:ext uri="{FF2B5EF4-FFF2-40B4-BE49-F238E27FC236}">
+                <a16:creationId xmlns:a16="http://schemas.microsoft.com/office/drawing/2014/main" id="{3258215D-5D96-7E23-7D2D-FCEFF91468F5}"/>
+              </a:ext>
+            </a:extLst>
+          </p:cNvPr>
+          <p:cNvSpPr txBox="1"/>
+          <p:nvPr/>
+        </p:nvSpPr>
+        <p:spPr>
+          <a:xfrm>
+            <a:off x="7150607" y="2637040"/>
+            <a:ext cx="4946905" cy="2308324"/>
+          </a:xfrm>
+          <a:prstGeom prst="rect">
+            <a:avLst/>
+          </a:prstGeom>
+          <a:noFill/>
+        </p:spPr>
+        <p:txBody>
+          <a:bodyPr wrap="square">
+            <a:spAutoFit/>
+          </a:bodyPr>
+          <a:lstStyle/>
+          <a:p>
+            <a:r>
+              <a:rPr lang="en-US" sz="2400" dirty="0">
+                <a:solidFill>
+                  <a:schemeClr val="accent6">
+                    <a:lumMod val="60000"/>
+                    <a:lumOff val="40000"/>
+                  </a:schemeClr>
+                </a:solidFill>
+              </a:rPr>
+              <a:t>{</a:t>
+            </a:r>
+          </a:p>
+          <a:p>
+            <a:r>
+              <a:rPr lang="en-US" sz="2400" dirty="0">
+                <a:solidFill>
+                  <a:schemeClr val="accent6">
+                    <a:lumMod val="60000"/>
+                    <a:lumOff val="40000"/>
+                  </a:schemeClr>
+                </a:solidFill>
+              </a:rPr>
+              <a:t>"patient name": “Loxford Kumar", </a:t>
+            </a:r>
+          </a:p>
+          <a:p>
+            <a:r>
+              <a:rPr lang="en-US" sz="2400" dirty="0">
+                <a:solidFill>
+                  <a:schemeClr val="accent6">
+                    <a:lumMod val="60000"/>
+                    <a:lumOff val="40000"/>
+                  </a:schemeClr>
+                </a:solidFill>
+              </a:rPr>
+              <a:t>"age": 36, </a:t>
+            </a:r>
+          </a:p>
+          <a:p>
+            <a:r>
+              <a:rPr lang="en-US" sz="2400" dirty="0">
+                <a:solidFill>
+                  <a:schemeClr val="accent6">
+                    <a:lumMod val="60000"/>
+                    <a:lumOff val="40000"/>
+                  </a:schemeClr>
+                </a:solidFill>
+              </a:rPr>
+              <a:t>"diagnosis": "Periodontal Abscess", </a:t>
+            </a:r>
+          </a:p>
+          <a:p>
+            <a:r>
+              <a:rPr lang="en-US" sz="2400" dirty="0">
+                <a:solidFill>
+                  <a:schemeClr val="accent6">
+                    <a:lumMod val="60000"/>
+                    <a:lumOff val="40000"/>
+                  </a:schemeClr>
+                </a:solidFill>
+              </a:rPr>
+              <a:t>"prescribed medication": “Helio”</a:t>
+            </a:r>
+          </a:p>
+          <a:p>
+            <a:r>
+              <a:rPr lang="en-US" sz="2400" dirty="0">
+                <a:solidFill>
+                  <a:schemeClr val="accent6">
+                    <a:lumMod val="60000"/>
+                    <a:lumOff val="40000"/>
+                  </a:schemeClr>
+                </a:solidFill>
+              </a:rPr>
+              <a:t>}</a:t>
+            </a:r>
+          </a:p>
+        </p:txBody>
+      </p:sp>
+      <p:sp>
+        <p:nvSpPr>
+          <p:cNvPr id="3" name="Rectangle: Rounded Corners 2">
+            <a:extLst>
+              <a:ext uri="{FF2B5EF4-FFF2-40B4-BE49-F238E27FC236}">
+                <a16:creationId xmlns:a16="http://schemas.microsoft.com/office/drawing/2014/main" id="{95AC0D19-EC15-60BD-670F-B096753A4D11}"/>
+              </a:ext>
+            </a:extLst>
+          </p:cNvPr>
+          <p:cNvSpPr/>
+          <p:nvPr/>
+        </p:nvSpPr>
+        <p:spPr>
+          <a:xfrm>
+            <a:off x="4640062" y="3297426"/>
+            <a:ext cx="1691640" cy="1024128"/>
+          </a:xfrm>
+          <a:prstGeom prst="roundRect">
+            <a:avLst/>
+          </a:prstGeom>
+        </p:spPr>
+        <p:style>
+          <a:lnRef idx="2">
+            <a:schemeClr val="accent1">
+              <a:shade val="15000"/>
+            </a:schemeClr>
+          </a:lnRef>
+          <a:fillRef idx="1">
+            <a:schemeClr val="accent1"/>
+          </a:fillRef>
+          <a:effectRef idx="0">
+            <a:schemeClr val="accent1"/>
+          </a:effectRef>
+          <a:fontRef idx="minor">
+            <a:schemeClr val="lt1"/>
+          </a:fontRef>
+        </p:style>
+        <p:txBody>
+          <a:bodyPr rtlCol="0" anchor="ctr"/>
+          <a:lstStyle/>
+          <a:p>
+            <a:pPr algn="ctr"/>
+            <a:r>
+              <a:rPr lang="en-US" sz="2400" dirty="0"/>
+              <a:t>Fine Tuned</a:t>
+            </a:r>
+          </a:p>
+          <a:p>
+            <a:pPr algn="ctr"/>
+            <a:r>
+              <a:rPr lang="en-US" sz="2400" dirty="0"/>
+              <a:t>Model</a:t>
+            </a:r>
+          </a:p>
+        </p:txBody>
+      </p:sp>
+      <p:sp>
+        <p:nvSpPr>
+          <p:cNvPr id="5" name="Arrow: Right 4">
+            <a:extLst>
+              <a:ext uri="{FF2B5EF4-FFF2-40B4-BE49-F238E27FC236}">
+                <a16:creationId xmlns:a16="http://schemas.microsoft.com/office/drawing/2014/main" id="{C2355450-534D-036E-534D-3D0B26CB9C9F}"/>
+              </a:ext>
+            </a:extLst>
+          </p:cNvPr>
+          <p:cNvSpPr/>
+          <p:nvPr/>
+        </p:nvSpPr>
+        <p:spPr>
+          <a:xfrm>
+            <a:off x="4023360" y="3630168"/>
+            <a:ext cx="521208" cy="329184"/>
+          </a:xfrm>
+          <a:prstGeom prst="rightArrow">
+            <a:avLst/>
+          </a:prstGeom>
+        </p:spPr>
+        <p:style>
+          <a:lnRef idx="2">
+            <a:schemeClr val="accent1">
+              <a:shade val="15000"/>
+            </a:schemeClr>
+          </a:lnRef>
+          <a:fillRef idx="1">
+            <a:schemeClr val="accent1"/>
+          </a:fillRef>
+          <a:effectRef idx="0">
+            <a:schemeClr val="accent1"/>
+          </a:effectRef>
+          <a:fontRef idx="minor">
+            <a:schemeClr val="lt1"/>
+          </a:fontRef>
+        </p:style>
+        <p:txBody>
+          <a:bodyPr rtlCol="0" anchor="ctr"/>
+          <a:lstStyle/>
+          <a:p>
+            <a:pPr algn="ctr"/>
+            <a:endParaRPr lang="en-US"/>
+          </a:p>
+        </p:txBody>
+      </p:sp>
+      <p:sp>
+        <p:nvSpPr>
+          <p:cNvPr id="7" name="Arrow: Right 6">
+            <a:extLst>
+              <a:ext uri="{FF2B5EF4-FFF2-40B4-BE49-F238E27FC236}">
+                <a16:creationId xmlns:a16="http://schemas.microsoft.com/office/drawing/2014/main" id="{FDB2E72A-984B-D9F7-4E55-71FB0C576CD1}"/>
+              </a:ext>
+            </a:extLst>
+          </p:cNvPr>
+          <p:cNvSpPr/>
+          <p:nvPr/>
+        </p:nvSpPr>
+        <p:spPr>
+          <a:xfrm>
+            <a:off x="6427196" y="3617976"/>
+            <a:ext cx="521208" cy="329184"/>
+          </a:xfrm>
+          <a:prstGeom prst="rightArrow">
+            <a:avLst/>
+          </a:prstGeom>
+        </p:spPr>
+        <p:style>
+          <a:lnRef idx="2">
+            <a:schemeClr val="accent1">
+              <a:shade val="15000"/>
+            </a:schemeClr>
+          </a:lnRef>
+          <a:fillRef idx="1">
+            <a:schemeClr val="accent1"/>
+          </a:fillRef>
+          <a:effectRef idx="0">
+            <a:schemeClr val="accent1"/>
+          </a:effectRef>
+          <a:fontRef idx="minor">
+            <a:schemeClr val="lt1"/>
+          </a:fontRef>
+        </p:style>
+        <p:txBody>
+          <a:bodyPr rtlCol="0" anchor="ctr"/>
+          <a:lstStyle/>
+          <a:p>
+            <a:pPr algn="ctr"/>
+            <a:endParaRPr lang="en-US"/>
+          </a:p>
+        </p:txBody>
+      </p:sp>
+    </p:spTree>
+    <p:extLst>
+      <p:ext uri="{BB962C8B-B14F-4D97-AF65-F5344CB8AC3E}">
+        <p14:creationId xmlns:p14="http://schemas.microsoft.com/office/powerpoint/2010/main" val="2088704518"/>
+      </p:ext>
+    </p:extLst>
+  </p:cSld>
+  <p:clrMapOvr>
+    <a:masterClrMapping/>
+  </p:clrMapOvr>
+</p:sld>
+</file>
+
+<file path=ppt/slides/slide6.xml><?xml version="1.0" encoding="utf-8"?>
 <p:sld xmlns:a="http://schemas.openxmlformats.org/drawingml/2006/main" xmlns:r="http://schemas.openxmlformats.org/officeDocument/2006/relationships" xmlns:p="http://schemas.openxmlformats.org/presentationml/2006/main">
   <p:cSld>
     <p:spTree>
@@ -5140,7 +7336,7 @@
         <p:spPr>
           <a:xfrm>
             <a:off x="2437890" y="210312"/>
-            <a:ext cx="2544030" cy="769441"/>
+            <a:ext cx="5751639" cy="769441"/>
           </a:xfrm>
           <a:prstGeom prst="rect">
             <a:avLst/>
@@ -5162,7 +7358,7 @@
                   </a:schemeClr>
                 </a:solidFill>
               </a:rPr>
-              <a:t>Work flow</a:t>
+              <a:t>Work flow of fine tuning</a:t>
             </a:r>
           </a:p>
         </p:txBody>
@@ -5187,8 +7383,8 @@
             <a:chExt cx="1064160" cy="780120"/>
           </a:xfrm>
         </p:grpSpPr>
-        <mc:AlternateContent xmlns:mc="http://schemas.openxmlformats.org/markup-compatibility/2006">
-          <mc:Choice xmlns:p14="http://schemas.microsoft.com/office/powerpoint/2010/main" Requires="p14">
+        <mc:AlternateContent xmlns:mc="http://schemas.openxmlformats.org/markup-compatibility/2006" xmlns:p14="http://schemas.microsoft.com/office/powerpoint/2010/main">
+          <mc:Choice Requires="p14">
             <p:contentPart p14:bwMode="auto" r:id="rId2">
               <p14:nvContentPartPr>
                 <p14:cNvPr id="9" name="Ink 8">
@@ -5207,7 +7403,7 @@
               </p14:xfrm>
             </p:contentPart>
           </mc:Choice>
-          <mc:Fallback>
+          <mc:Fallback xmlns="">
             <p:pic>
               <p:nvPicPr>
                 <p:cNvPr id="9" name="Ink 8">
@@ -5238,8 +7434,8 @@
             </p:pic>
           </mc:Fallback>
         </mc:AlternateContent>
-        <mc:AlternateContent xmlns:mc="http://schemas.openxmlformats.org/markup-compatibility/2006">
-          <mc:Choice xmlns:p14="http://schemas.microsoft.com/office/powerpoint/2010/main" Requires="p14">
+        <mc:AlternateContent xmlns:mc="http://schemas.openxmlformats.org/markup-compatibility/2006" xmlns:p14="http://schemas.microsoft.com/office/powerpoint/2010/main">
+          <mc:Choice Requires="p14">
             <p:contentPart p14:bwMode="auto" r:id="rId4">
               <p14:nvContentPartPr>
                 <p14:cNvPr id="10" name="Ink 9">
@@ -5258,7 +7454,7 @@
               </p14:xfrm>
             </p:contentPart>
           </mc:Choice>
-          <mc:Fallback>
+          <mc:Fallback xmlns="">
             <p:pic>
               <p:nvPicPr>
                 <p:cNvPr id="10" name="Ink 9">
@@ -5303,7 +7499,7 @@
 </p:sld>
 </file>
 
-<file path=ppt/slides/slide4.xml><?xml version="1.0" encoding="utf-8"?>
+<file path=ppt/slides/slide7.xml><?xml version="1.0" encoding="utf-8"?>
 <p:sld xmlns:a="http://schemas.openxmlformats.org/drawingml/2006/main" xmlns:r="http://schemas.openxmlformats.org/officeDocument/2006/relationships" xmlns:p="http://schemas.openxmlformats.org/presentationml/2006/main">
   <p:cSld>
     <p:spTree>
@@ -5398,6 +7594,108 @@
           </a:prstGeom>
         </p:spPr>
       </p:pic>
+      <mc:AlternateContent xmlns:mc="http://schemas.openxmlformats.org/markup-compatibility/2006">
+        <mc:Choice xmlns:p14="http://schemas.microsoft.com/office/powerpoint/2010/main" Requires="p14">
+          <p:contentPart p14:bwMode="auto" r:id="rId3">
+            <p14:nvContentPartPr>
+              <p14:cNvPr id="3" name="Ink 2">
+                <a:extLst>
+                  <a:ext uri="{FF2B5EF4-FFF2-40B4-BE49-F238E27FC236}">
+                    <a16:creationId xmlns:a16="http://schemas.microsoft.com/office/drawing/2014/main" id="{2B3A6752-5E99-41CB-5F33-4231E6C6F3B7}"/>
+                  </a:ext>
+                </a:extLst>
+              </p14:cNvPr>
+              <p14:cNvContentPartPr/>
+              <p14:nvPr/>
+            </p14:nvContentPartPr>
+            <p14:xfrm>
+              <a:off x="9930384" y="2332656"/>
+              <a:ext cx="351720" cy="250200"/>
+            </p14:xfrm>
+          </p:contentPart>
+        </mc:Choice>
+        <mc:Fallback>
+          <p:pic>
+            <p:nvPicPr>
+              <p:cNvPr id="3" name="Ink 2">
+                <a:extLst>
+                  <a:ext uri="{FF2B5EF4-FFF2-40B4-BE49-F238E27FC236}">
+                    <a16:creationId xmlns:a16="http://schemas.microsoft.com/office/drawing/2014/main" id="{2B3A6752-5E99-41CB-5F33-4231E6C6F3B7}"/>
+                  </a:ext>
+                </a:extLst>
+              </p:cNvPr>
+              <p:cNvPicPr/>
+              <p:nvPr/>
+            </p:nvPicPr>
+            <p:blipFill>
+              <a:blip r:embed="rId4"/>
+              <a:stretch>
+                <a:fillRect/>
+              </a:stretch>
+            </p:blipFill>
+            <p:spPr>
+              <a:xfrm>
+                <a:off x="9912384" y="2314656"/>
+                <a:ext cx="387360" cy="285840"/>
+              </a:xfrm>
+              <a:prstGeom prst="rect">
+                <a:avLst/>
+              </a:prstGeom>
+            </p:spPr>
+          </p:pic>
+        </mc:Fallback>
+      </mc:AlternateContent>
+      <mc:AlternateContent xmlns:mc="http://schemas.openxmlformats.org/markup-compatibility/2006">
+        <mc:Choice xmlns:p14="http://schemas.microsoft.com/office/powerpoint/2010/main" Requires="p14">
+          <p:contentPart p14:bwMode="auto" r:id="rId5">
+            <p14:nvContentPartPr>
+              <p14:cNvPr id="5" name="Ink 4">
+                <a:extLst>
+                  <a:ext uri="{FF2B5EF4-FFF2-40B4-BE49-F238E27FC236}">
+                    <a16:creationId xmlns:a16="http://schemas.microsoft.com/office/drawing/2014/main" id="{C4511BEE-2211-5C38-51C7-39F32069D861}"/>
+                  </a:ext>
+                </a:extLst>
+              </p14:cNvPr>
+              <p14:cNvContentPartPr/>
+              <p14:nvPr/>
+            </p14:nvContentPartPr>
+            <p14:xfrm>
+              <a:off x="1855944" y="3975696"/>
+              <a:ext cx="273960" cy="361440"/>
+            </p14:xfrm>
+          </p:contentPart>
+        </mc:Choice>
+        <mc:Fallback>
+          <p:pic>
+            <p:nvPicPr>
+              <p:cNvPr id="5" name="Ink 4">
+                <a:extLst>
+                  <a:ext uri="{FF2B5EF4-FFF2-40B4-BE49-F238E27FC236}">
+                    <a16:creationId xmlns:a16="http://schemas.microsoft.com/office/drawing/2014/main" id="{C4511BEE-2211-5C38-51C7-39F32069D861}"/>
+                  </a:ext>
+                </a:extLst>
+              </p:cNvPr>
+              <p:cNvPicPr/>
+              <p:nvPr/>
+            </p:nvPicPr>
+            <p:blipFill>
+              <a:blip r:embed="rId6"/>
+              <a:stretch>
+                <a:fillRect/>
+              </a:stretch>
+            </p:blipFill>
+            <p:spPr>
+              <a:xfrm>
+                <a:off x="1838304" y="3958056"/>
+                <a:ext cx="309600" cy="397080"/>
+              </a:xfrm>
+              <a:prstGeom prst="rect">
+                <a:avLst/>
+              </a:prstGeom>
+            </p:spPr>
+          </p:pic>
+        </mc:Fallback>
+      </mc:AlternateContent>
     </p:spTree>
     <p:extLst>
       <p:ext uri="{BB962C8B-B14F-4D97-AF65-F5344CB8AC3E}">
@@ -5411,7 +7709,7 @@
 </p:sld>
 </file>
 
-<file path=ppt/slides/slide5.xml><?xml version="1.0" encoding="utf-8"?>
+<file path=ppt/slides/slide8.xml><?xml version="1.0" encoding="utf-8"?>
 <p:sld xmlns:a="http://schemas.openxmlformats.org/drawingml/2006/main" xmlns:r="http://schemas.openxmlformats.org/officeDocument/2006/relationships" xmlns:p="http://schemas.openxmlformats.org/presentationml/2006/main">
   <p:cSld>
     <p:spTree>
@@ -5448,8 +7746,8 @@
         </p:nvSpPr>
         <p:spPr>
           <a:xfrm>
-            <a:off x="0" y="78714"/>
-            <a:ext cx="4474879" cy="461665"/>
+            <a:off x="3402486" y="0"/>
+            <a:ext cx="2644250" cy="461665"/>
           </a:xfrm>
           <a:prstGeom prst="rect">
             <a:avLst/>
@@ -5472,17 +7770,17 @@
                   </a:schemeClr>
                 </a:solidFill>
               </a:rPr>
-              <a:t>Fine tuning on Open AI Dashboard</a:t>
+              <a:t>Click on  Dashboard</a:t>
             </a:r>
           </a:p>
         </p:txBody>
       </p:sp>
       <p:pic>
         <p:nvPicPr>
-          <p:cNvPr id="9" name="Picture 8">
-            <a:extLst>
-              <a:ext uri="{FF2B5EF4-FFF2-40B4-BE49-F238E27FC236}">
-                <a16:creationId xmlns:a16="http://schemas.microsoft.com/office/drawing/2014/main" id="{A94121AD-BF10-07C5-B4D5-C3E68151AE2E}"/>
+          <p:cNvPr id="5" name="Picture 4">
+            <a:extLst>
+              <a:ext uri="{FF2B5EF4-FFF2-40B4-BE49-F238E27FC236}">
+                <a16:creationId xmlns:a16="http://schemas.microsoft.com/office/drawing/2014/main" id="{625534D8-2331-8CB0-D084-5D8164F25E71}"/>
               </a:ext>
             </a:extLst>
           </p:cNvPr>
@@ -5499,14 +7797,116 @@
         </p:blipFill>
         <p:spPr>
           <a:xfrm>
-            <a:off x="256032" y="1132986"/>
-            <a:ext cx="11497056" cy="5451921"/>
+            <a:off x="207738" y="790770"/>
+            <a:ext cx="11776524" cy="5988516"/>
           </a:xfrm>
           <a:prstGeom prst="rect">
             <a:avLst/>
           </a:prstGeom>
         </p:spPr>
       </p:pic>
+      <mc:AlternateContent xmlns:mc="http://schemas.openxmlformats.org/markup-compatibility/2006">
+        <mc:Choice xmlns:p14="http://schemas.microsoft.com/office/powerpoint/2010/main" Requires="p14">
+          <p:contentPart p14:bwMode="auto" r:id="rId3">
+            <p14:nvContentPartPr>
+              <p14:cNvPr id="6" name="Ink 5">
+                <a:extLst>
+                  <a:ext uri="{FF2B5EF4-FFF2-40B4-BE49-F238E27FC236}">
+                    <a16:creationId xmlns:a16="http://schemas.microsoft.com/office/drawing/2014/main" id="{37A48F91-782C-9445-47A6-1F3F72115633}"/>
+                  </a:ext>
+                </a:extLst>
+              </p14:cNvPr>
+              <p14:cNvContentPartPr/>
+              <p14:nvPr/>
+            </p14:nvContentPartPr>
+            <p14:xfrm>
+              <a:off x="10697544" y="1444536"/>
+              <a:ext cx="906480" cy="413280"/>
+            </p14:xfrm>
+          </p:contentPart>
+        </mc:Choice>
+        <mc:Fallback>
+          <p:pic>
+            <p:nvPicPr>
+              <p:cNvPr id="6" name="Ink 5">
+                <a:extLst>
+                  <a:ext uri="{FF2B5EF4-FFF2-40B4-BE49-F238E27FC236}">
+                    <a16:creationId xmlns:a16="http://schemas.microsoft.com/office/drawing/2014/main" id="{37A48F91-782C-9445-47A6-1F3F72115633}"/>
+                  </a:ext>
+                </a:extLst>
+              </p:cNvPr>
+              <p:cNvPicPr/>
+              <p:nvPr/>
+            </p:nvPicPr>
+            <p:blipFill>
+              <a:blip r:embed="rId4"/>
+              <a:stretch>
+                <a:fillRect/>
+              </a:stretch>
+            </p:blipFill>
+            <p:spPr>
+              <a:xfrm>
+                <a:off x="10679544" y="1426536"/>
+                <a:ext cx="942120" cy="448920"/>
+              </a:xfrm>
+              <a:prstGeom prst="rect">
+                <a:avLst/>
+              </a:prstGeom>
+            </p:spPr>
+          </p:pic>
+        </mc:Fallback>
+      </mc:AlternateContent>
+      <mc:AlternateContent xmlns:mc="http://schemas.openxmlformats.org/markup-compatibility/2006">
+        <mc:Choice xmlns:p14="http://schemas.microsoft.com/office/powerpoint/2010/main" Requires="p14">
+          <p:contentPart p14:bwMode="auto" r:id="rId5">
+            <p14:nvContentPartPr>
+              <p14:cNvPr id="8" name="Ink 7">
+                <a:extLst>
+                  <a:ext uri="{FF2B5EF4-FFF2-40B4-BE49-F238E27FC236}">
+                    <a16:creationId xmlns:a16="http://schemas.microsoft.com/office/drawing/2014/main" id="{42E1BF35-9C07-18B3-3A5B-C301BAED9CA8}"/>
+                  </a:ext>
+                </a:extLst>
+              </p14:cNvPr>
+              <p14:cNvContentPartPr/>
+              <p14:nvPr/>
+            </p14:nvContentPartPr>
+            <p14:xfrm>
+              <a:off x="409104" y="6409656"/>
+              <a:ext cx="810360" cy="394560"/>
+            </p14:xfrm>
+          </p:contentPart>
+        </mc:Choice>
+        <mc:Fallback>
+          <p:pic>
+            <p:nvPicPr>
+              <p:cNvPr id="8" name="Ink 7">
+                <a:extLst>
+                  <a:ext uri="{FF2B5EF4-FFF2-40B4-BE49-F238E27FC236}">
+                    <a16:creationId xmlns:a16="http://schemas.microsoft.com/office/drawing/2014/main" id="{42E1BF35-9C07-18B3-3A5B-C301BAED9CA8}"/>
+                  </a:ext>
+                </a:extLst>
+              </p:cNvPr>
+              <p:cNvPicPr/>
+              <p:nvPr/>
+            </p:nvPicPr>
+            <p:blipFill>
+              <a:blip r:embed="rId6"/>
+              <a:stretch>
+                <a:fillRect/>
+              </a:stretch>
+            </p:blipFill>
+            <p:spPr>
+              <a:xfrm>
+                <a:off x="391104" y="6392016"/>
+                <a:ext cx="846000" cy="430200"/>
+              </a:xfrm>
+              <a:prstGeom prst="rect">
+                <a:avLst/>
+              </a:prstGeom>
+            </p:spPr>
+          </p:pic>
+        </mc:Fallback>
+      </mc:AlternateContent>
     </p:spTree>
     <p:extLst>
       <p:ext uri="{BB962C8B-B14F-4D97-AF65-F5344CB8AC3E}">
@@ -5520,7 +7920,7 @@
 </p:sld>
 </file>
 
-<file path=ppt/slides/slide6.xml><?xml version="1.0" encoding="utf-8"?>
+<file path=ppt/slides/slide9.xml><?xml version="1.0" encoding="utf-8"?>
 <p:sld xmlns:a="http://schemas.openxmlformats.org/drawingml/2006/main" xmlns:r="http://schemas.openxmlformats.org/officeDocument/2006/relationships" xmlns:p="http://schemas.openxmlformats.org/presentationml/2006/main">
   <p:cSld>
     <p:spTree>
@@ -5528,7 +7928,7 @@
         <p:cNvPr id="1" name="">
           <a:extLst>
             <a:ext uri="{FF2B5EF4-FFF2-40B4-BE49-F238E27FC236}">
-              <a16:creationId xmlns:a16="http://schemas.microsoft.com/office/drawing/2014/main" id="{416B5997-38DB-371A-2AFF-C2A0B75523BF}"/>
+              <a16:creationId xmlns:a16="http://schemas.microsoft.com/office/drawing/2014/main" id="{A0CE5B34-EE5D-0E1C-5DA6-C001E635859E}"/>
             </a:ext>
           </a:extLst>
         </p:cNvPr>
@@ -5548,7 +7948,7 @@
           <p:cNvPr id="2" name="TextBox 1">
             <a:extLst>
               <a:ext uri="{FF2B5EF4-FFF2-40B4-BE49-F238E27FC236}">
-                <a16:creationId xmlns:a16="http://schemas.microsoft.com/office/drawing/2014/main" id="{E87CDA49-6464-FA5D-B443-8DE7C9A6DEE1}"/>
+                <a16:creationId xmlns:a16="http://schemas.microsoft.com/office/drawing/2014/main" id="{D2F8D6C6-06E1-804D-FE42-3B3FBCD8256F}"/>
               </a:ext>
             </a:extLst>
           </p:cNvPr>
@@ -5557,8 +7957,8 @@
         </p:nvSpPr>
         <p:spPr>
           <a:xfrm>
-            <a:off x="1162267" y="78714"/>
-            <a:ext cx="6027419" cy="461665"/>
+            <a:off x="1713987" y="78714"/>
+            <a:ext cx="6789359" cy="461665"/>
           </a:xfrm>
           <a:prstGeom prst="rect">
             <a:avLst/>
@@ -5581,17 +7981,39 @@
                   </a:schemeClr>
                 </a:solidFill>
               </a:rPr>
-              <a:t>Playground -&gt; Chat with your fine-tuned model</a:t>
+              <a:t>Click on </a:t>
+            </a:r>
+            <a:r>
+              <a:rPr lang="en-US" sz="2400" b="1" dirty="0">
+                <a:solidFill>
+                  <a:schemeClr val="accent6">
+                    <a:lumMod val="60000"/>
+                    <a:lumOff val="40000"/>
+                  </a:schemeClr>
+                </a:solidFill>
+              </a:rPr>
+              <a:t>Create</a:t>
+            </a:r>
+            <a:r>
+              <a:rPr lang="en-US" sz="2400" dirty="0">
+                <a:solidFill>
+                  <a:schemeClr val="accent6">
+                    <a:lumMod val="60000"/>
+                    <a:lumOff val="40000"/>
+                  </a:schemeClr>
+                </a:solidFill>
+              </a:rPr>
+              <a:t> -&gt; I used this screen to find the model</a:t>
             </a:r>
           </a:p>
         </p:txBody>
       </p:sp>
       <p:pic>
         <p:nvPicPr>
-          <p:cNvPr id="4" name="Picture 3">
-            <a:extLst>
-              <a:ext uri="{FF2B5EF4-FFF2-40B4-BE49-F238E27FC236}">
-                <a16:creationId xmlns:a16="http://schemas.microsoft.com/office/drawing/2014/main" id="{7B33EBE4-6DA2-F200-1F48-A31DDBD45607}"/>
+          <p:cNvPr id="7" name="Picture 6">
+            <a:extLst>
+              <a:ext uri="{FF2B5EF4-FFF2-40B4-BE49-F238E27FC236}">
+                <a16:creationId xmlns:a16="http://schemas.microsoft.com/office/drawing/2014/main" id="{01D3CE9A-C733-D0C9-B98B-AA12AD327CDB}"/>
               </a:ext>
             </a:extLst>
           </p:cNvPr>
@@ -5608,54 +8030,171 @@
         </p:blipFill>
         <p:spPr>
           <a:xfrm>
-            <a:off x="152218" y="1036854"/>
-            <a:ext cx="11317405" cy="5742432"/>
+            <a:off x="594360" y="872702"/>
+            <a:ext cx="11003280" cy="5906584"/>
           </a:xfrm>
           <a:prstGeom prst="rect">
             <a:avLst/>
           </a:prstGeom>
         </p:spPr>
       </p:pic>
+      <mc:AlternateContent xmlns:mc="http://schemas.openxmlformats.org/markup-compatibility/2006">
+        <mc:Choice xmlns:p14="http://schemas.microsoft.com/office/powerpoint/2010/main" Requires="p14">
+          <p:contentPart p14:bwMode="auto" r:id="rId3">
+            <p14:nvContentPartPr>
+              <p14:cNvPr id="9" name="Ink 8">
+                <a:extLst>
+                  <a:ext uri="{FF2B5EF4-FFF2-40B4-BE49-F238E27FC236}">
+                    <a16:creationId xmlns:a16="http://schemas.microsoft.com/office/drawing/2014/main" id="{9140DA21-6320-93CC-95E9-F20A19FB8A81}"/>
+                  </a:ext>
+                </a:extLst>
+              </p14:cNvPr>
+              <p14:cNvContentPartPr/>
+              <p14:nvPr/>
+            </p14:nvContentPartPr>
+            <p14:xfrm>
+              <a:off x="10853784" y="1762776"/>
+              <a:ext cx="602640" cy="29520"/>
+            </p14:xfrm>
+          </p:contentPart>
+        </mc:Choice>
+        <mc:Fallback>
+          <p:pic>
+            <p:nvPicPr>
+              <p:cNvPr id="9" name="Ink 8">
+                <a:extLst>
+                  <a:ext uri="{FF2B5EF4-FFF2-40B4-BE49-F238E27FC236}">
+                    <a16:creationId xmlns:a16="http://schemas.microsoft.com/office/drawing/2014/main" id="{9140DA21-6320-93CC-95E9-F20A19FB8A81}"/>
+                  </a:ext>
+                </a:extLst>
+              </p:cNvPr>
+              <p:cNvPicPr/>
+              <p:nvPr/>
+            </p:nvPicPr>
+            <p:blipFill>
+              <a:blip r:embed="rId4"/>
+              <a:stretch>
+                <a:fillRect/>
+              </a:stretch>
+            </p:blipFill>
+            <p:spPr>
+              <a:xfrm>
+                <a:off x="10817784" y="1727136"/>
+                <a:ext cx="674280" cy="101160"/>
+              </a:xfrm>
+              <a:prstGeom prst="rect">
+                <a:avLst/>
+              </a:prstGeom>
+            </p:spPr>
+          </p:pic>
+        </mc:Fallback>
+      </mc:AlternateContent>
+      <mc:AlternateContent xmlns:mc="http://schemas.openxmlformats.org/markup-compatibility/2006">
+        <mc:Choice xmlns:p14="http://schemas.microsoft.com/office/powerpoint/2010/main" Requires="p14">
+          <p:contentPart p14:bwMode="auto" r:id="rId5">
+            <p14:nvContentPartPr>
+              <p14:cNvPr id="10" name="Ink 9">
+                <a:extLst>
+                  <a:ext uri="{FF2B5EF4-FFF2-40B4-BE49-F238E27FC236}">
+                    <a16:creationId xmlns:a16="http://schemas.microsoft.com/office/drawing/2014/main" id="{97590EB2-407B-FC92-F63D-4B4A0D50C93B}"/>
+                  </a:ext>
+                </a:extLst>
+              </p14:cNvPr>
+              <p14:cNvContentPartPr/>
+              <p14:nvPr/>
+            </p14:nvContentPartPr>
+            <p14:xfrm>
+              <a:off x="4626864" y="2829456"/>
+              <a:ext cx="355680" cy="138600"/>
+            </p14:xfrm>
+          </p:contentPart>
+        </mc:Choice>
+        <mc:Fallback>
+          <p:pic>
+            <p:nvPicPr>
+              <p:cNvPr id="10" name="Ink 9">
+                <a:extLst>
+                  <a:ext uri="{FF2B5EF4-FFF2-40B4-BE49-F238E27FC236}">
+                    <a16:creationId xmlns:a16="http://schemas.microsoft.com/office/drawing/2014/main" id="{97590EB2-407B-FC92-F63D-4B4A0D50C93B}"/>
+                  </a:ext>
+                </a:extLst>
+              </p:cNvPr>
+              <p:cNvPicPr/>
+              <p:nvPr/>
+            </p:nvPicPr>
+            <p:blipFill>
+              <a:blip r:embed="rId6"/>
+              <a:stretch>
+                <a:fillRect/>
+              </a:stretch>
+            </p:blipFill>
+            <p:spPr>
+              <a:xfrm>
+                <a:off x="4590864" y="2793456"/>
+                <a:ext cx="427320" cy="210240"/>
+              </a:xfrm>
+              <a:prstGeom prst="rect">
+                <a:avLst/>
+              </a:prstGeom>
+            </p:spPr>
+          </p:pic>
+        </mc:Fallback>
+      </mc:AlternateContent>
+      <mc:AlternateContent xmlns:mc="http://schemas.openxmlformats.org/markup-compatibility/2006">
+        <mc:Choice xmlns:p14="http://schemas.microsoft.com/office/powerpoint/2010/main" Requires="p14">
+          <p:contentPart p14:bwMode="auto" r:id="rId7">
+            <p14:nvContentPartPr>
+              <p14:cNvPr id="11" name="Ink 10">
+                <a:extLst>
+                  <a:ext uri="{FF2B5EF4-FFF2-40B4-BE49-F238E27FC236}">
+                    <a16:creationId xmlns:a16="http://schemas.microsoft.com/office/drawing/2014/main" id="{754542CA-71DB-9D0D-6974-CA259389823A}"/>
+                  </a:ext>
+                </a:extLst>
+              </p14:cNvPr>
+              <p14:cNvContentPartPr/>
+              <p14:nvPr/>
+            </p14:nvContentPartPr>
+            <p14:xfrm>
+              <a:off x="5851944" y="2144016"/>
+              <a:ext cx="381240" cy="236520"/>
+            </p14:xfrm>
+          </p:contentPart>
+        </mc:Choice>
+        <mc:Fallback>
+          <p:pic>
+            <p:nvPicPr>
+              <p:cNvPr id="11" name="Ink 10">
+                <a:extLst>
+                  <a:ext uri="{FF2B5EF4-FFF2-40B4-BE49-F238E27FC236}">
+                    <a16:creationId xmlns:a16="http://schemas.microsoft.com/office/drawing/2014/main" id="{754542CA-71DB-9D0D-6974-CA259389823A}"/>
+                  </a:ext>
+                </a:extLst>
+              </p:cNvPr>
+              <p:cNvPicPr/>
+              <p:nvPr/>
+            </p:nvPicPr>
+            <p:blipFill>
+              <a:blip r:embed="rId8"/>
+              <a:stretch>
+                <a:fillRect/>
+              </a:stretch>
+            </p:blipFill>
+            <p:spPr>
+              <a:xfrm>
+                <a:off x="5815944" y="2108016"/>
+                <a:ext cx="452880" cy="308160"/>
+              </a:xfrm>
+              <a:prstGeom prst="rect">
+                <a:avLst/>
+              </a:prstGeom>
+            </p:spPr>
+          </p:pic>
+        </mc:Fallback>
+      </mc:AlternateContent>
     </p:spTree>
     <p:extLst>
       <p:ext uri="{BB962C8B-B14F-4D97-AF65-F5344CB8AC3E}">
-        <p14:creationId xmlns:p14="http://schemas.microsoft.com/office/powerpoint/2010/main" val="908214078"/>
-      </p:ext>
-    </p:extLst>
-  </p:cSld>
-  <p:clrMapOvr>
-    <a:masterClrMapping/>
-  </p:clrMapOvr>
-</p:sld>
-</file>
-
-<file path=ppt/slides/slide7.xml><?xml version="1.0" encoding="utf-8"?>
-<p:sld xmlns:a="http://schemas.openxmlformats.org/drawingml/2006/main" xmlns:r="http://schemas.openxmlformats.org/officeDocument/2006/relationships" xmlns:p="http://schemas.openxmlformats.org/presentationml/2006/main">
-  <p:cSld>
-    <p:spTree>
-      <p:nvGrpSpPr>
-        <p:cNvPr id="1" name="">
-          <a:extLst>
-            <a:ext uri="{FF2B5EF4-FFF2-40B4-BE49-F238E27FC236}">
-              <a16:creationId xmlns:a16="http://schemas.microsoft.com/office/drawing/2014/main" id="{EEBECFA4-2524-938D-31D5-098A85E10342}"/>
-            </a:ext>
-          </a:extLst>
-        </p:cNvPr>
-        <p:cNvGrpSpPr/>
-        <p:nvPr/>
-      </p:nvGrpSpPr>
-      <p:grpSpPr>
-        <a:xfrm>
-          <a:off x="0" y="0"/>
-          <a:ext cx="0" cy="0"/>
-          <a:chOff x="0" y="0"/>
-          <a:chExt cx="0" cy="0"/>
-        </a:xfrm>
-      </p:grpSpPr>
-    </p:spTree>
-    <p:extLst>
-      <p:ext uri="{BB962C8B-B14F-4D97-AF65-F5344CB8AC3E}">
-        <p14:creationId xmlns:p14="http://schemas.microsoft.com/office/powerpoint/2010/main" val="2684895119"/>
+        <p14:creationId xmlns:p14="http://schemas.microsoft.com/office/powerpoint/2010/main" val="395901923"/>
       </p:ext>
     </p:extLst>
   </p:cSld>

--- a/deep_learning/fine_tuning/FT-openai-structured-output-for-medical-domain/work-flow.pptx
+++ b/deep_learning/fine_tuning/FT-openai-structured-output-for-medical-domain/work-flow.pptx
@@ -228,7 +228,7 @@
           <a:p>
             <a:fld id="{7BAEECA8-D063-486F-AE31-5020270C1449}" type="datetimeFigureOut">
               <a:rPr lang="en-US" smtClean="0"/>
-              <a:t>5/20/2026</a:t>
+              <a:t>6/10/2026</a:t>
             </a:fld>
             <a:endParaRPr lang="en-US"/>
           </a:p>
@@ -853,7 +853,7 @@
           <a:p>
             <a:fld id="{CB233BD1-3BA8-448D-9D08-7846095EA517}" type="datetimeFigureOut">
               <a:rPr lang="en-US" smtClean="0"/>
-              <a:t>5/20/2026</a:t>
+              <a:t>6/10/2026</a:t>
             </a:fld>
             <a:endParaRPr lang="en-US"/>
           </a:p>
@@ -1267,7 +1267,7 @@
           <a:p>
             <a:fld id="{6383FAE1-13DE-4511-8C1B-C8AFB720664C}" type="datetimeFigureOut">
               <a:rPr lang="en-US" smtClean="0"/>
-              <a:t>5/20/2026</a:t>
+              <a:t>6/10/2026</a:t>
             </a:fld>
             <a:endParaRPr lang="en-US"/>
           </a:p>
@@ -1465,7 +1465,7 @@
           <a:p>
             <a:fld id="{6383FAE1-13DE-4511-8C1B-C8AFB720664C}" type="datetimeFigureOut">
               <a:rPr lang="en-US" smtClean="0"/>
-              <a:t>5/20/2026</a:t>
+              <a:t>6/10/2026</a:t>
             </a:fld>
             <a:endParaRPr lang="en-US"/>
           </a:p>
@@ -1673,7 +1673,7 @@
           <a:p>
             <a:fld id="{6383FAE1-13DE-4511-8C1B-C8AFB720664C}" type="datetimeFigureOut">
               <a:rPr lang="en-US" smtClean="0"/>
-              <a:t>5/20/2026</a:t>
+              <a:t>6/10/2026</a:t>
             </a:fld>
             <a:endParaRPr lang="en-US"/>
           </a:p>
@@ -1871,7 +1871,7 @@
           <a:p>
             <a:fld id="{6383FAE1-13DE-4511-8C1B-C8AFB720664C}" type="datetimeFigureOut">
               <a:rPr lang="en-US" smtClean="0"/>
-              <a:t>5/20/2026</a:t>
+              <a:t>6/10/2026</a:t>
             </a:fld>
             <a:endParaRPr lang="en-US"/>
           </a:p>
@@ -2146,7 +2146,7 @@
           <a:p>
             <a:fld id="{6383FAE1-13DE-4511-8C1B-C8AFB720664C}" type="datetimeFigureOut">
               <a:rPr lang="en-US" smtClean="0"/>
-              <a:t>5/20/2026</a:t>
+              <a:t>6/10/2026</a:t>
             </a:fld>
             <a:endParaRPr lang="en-US"/>
           </a:p>
@@ -2411,7 +2411,7 @@
           <a:p>
             <a:fld id="{6383FAE1-13DE-4511-8C1B-C8AFB720664C}" type="datetimeFigureOut">
               <a:rPr lang="en-US" smtClean="0"/>
-              <a:t>5/20/2026</a:t>
+              <a:t>6/10/2026</a:t>
             </a:fld>
             <a:endParaRPr lang="en-US"/>
           </a:p>
@@ -2823,7 +2823,7 @@
           <a:p>
             <a:fld id="{6383FAE1-13DE-4511-8C1B-C8AFB720664C}" type="datetimeFigureOut">
               <a:rPr lang="en-US" smtClean="0"/>
-              <a:t>5/20/2026</a:t>
+              <a:t>6/10/2026</a:t>
             </a:fld>
             <a:endParaRPr lang="en-US"/>
           </a:p>
@@ -2964,7 +2964,7 @@
           <a:p>
             <a:fld id="{6383FAE1-13DE-4511-8C1B-C8AFB720664C}" type="datetimeFigureOut">
               <a:rPr lang="en-US" smtClean="0"/>
-              <a:t>5/20/2026</a:t>
+              <a:t>6/10/2026</a:t>
             </a:fld>
             <a:endParaRPr lang="en-US"/>
           </a:p>
@@ -3077,7 +3077,7 @@
           <a:p>
             <a:fld id="{6383FAE1-13DE-4511-8C1B-C8AFB720664C}" type="datetimeFigureOut">
               <a:rPr lang="en-US" smtClean="0"/>
-              <a:t>5/20/2026</a:t>
+              <a:t>6/10/2026</a:t>
             </a:fld>
             <a:endParaRPr lang="en-US"/>
           </a:p>
@@ -3388,7 +3388,7 @@
           <a:p>
             <a:fld id="{6383FAE1-13DE-4511-8C1B-C8AFB720664C}" type="datetimeFigureOut">
               <a:rPr lang="en-US" smtClean="0"/>
-              <a:t>5/20/2026</a:t>
+              <a:t>6/10/2026</a:t>
             </a:fld>
             <a:endParaRPr lang="en-US"/>
           </a:p>
@@ -3679,7 +3679,7 @@
           <a:p>
             <a:fld id="{6383FAE1-13DE-4511-8C1B-C8AFB720664C}" type="datetimeFigureOut">
               <a:rPr lang="en-US" smtClean="0"/>
-              <a:t>5/20/2026</a:t>
+              <a:t>6/10/2026</a:t>
             </a:fld>
             <a:endParaRPr lang="en-US"/>
           </a:p>
@@ -3923,7 +3923,7 @@
           <a:p>
             <a:fld id="{6383FAE1-13DE-4511-8C1B-C8AFB720664C}" type="datetimeFigureOut">
               <a:rPr lang="en-US" smtClean="0"/>
-              <a:t>5/20/2026</a:t>
+              <a:t>6/10/2026</a:t>
             </a:fld>
             <a:endParaRPr lang="en-US"/>
           </a:p>
@@ -4756,8 +4756,8 @@
           </a:prstGeom>
         </p:spPr>
       </p:pic>
-      <mc:AlternateContent xmlns:mc="http://schemas.openxmlformats.org/markup-compatibility/2006">
-        <mc:Choice xmlns:p14="http://schemas.microsoft.com/office/powerpoint/2010/main" Requires="p14">
+      <mc:AlternateContent xmlns:mc="http://schemas.openxmlformats.org/markup-compatibility/2006" xmlns:p14="http://schemas.microsoft.com/office/powerpoint/2010/main">
+        <mc:Choice Requires="p14">
           <p:contentPart p14:bwMode="auto" r:id="rId3">
             <p14:nvContentPartPr>
               <p14:cNvPr id="3" name="Ink 2">
@@ -4776,7 +4776,7 @@
             </p14:xfrm>
           </p:contentPart>
         </mc:Choice>
-        <mc:Fallback>
+        <mc:Fallback xmlns="">
           <p:pic>
             <p:nvPicPr>
               <p:cNvPr id="3" name="Ink 2">
@@ -4807,8 +4807,8 @@
           </p:pic>
         </mc:Fallback>
       </mc:AlternateContent>
-      <mc:AlternateContent xmlns:mc="http://schemas.openxmlformats.org/markup-compatibility/2006">
-        <mc:Choice xmlns:p14="http://schemas.microsoft.com/office/powerpoint/2010/main" Requires="p14">
+      <mc:AlternateContent xmlns:mc="http://schemas.openxmlformats.org/markup-compatibility/2006" xmlns:p14="http://schemas.microsoft.com/office/powerpoint/2010/main">
+        <mc:Choice Requires="p14">
           <p:contentPart p14:bwMode="auto" r:id="rId5">
             <p14:nvContentPartPr>
               <p14:cNvPr id="4" name="Ink 3">
@@ -4827,7 +4827,7 @@
             </p14:xfrm>
           </p:contentPart>
         </mc:Choice>
-        <mc:Fallback>
+        <mc:Fallback xmlns="">
           <p:pic>
             <p:nvPicPr>
               <p:cNvPr id="4" name="Ink 3">
@@ -4858,8 +4858,8 @@
           </p:pic>
         </mc:Fallback>
       </mc:AlternateContent>
-      <mc:AlternateContent xmlns:mc="http://schemas.openxmlformats.org/markup-compatibility/2006">
-        <mc:Choice xmlns:p14="http://schemas.microsoft.com/office/powerpoint/2010/main" Requires="p14">
+      <mc:AlternateContent xmlns:mc="http://schemas.openxmlformats.org/markup-compatibility/2006" xmlns:p14="http://schemas.microsoft.com/office/powerpoint/2010/main">
+        <mc:Choice Requires="p14">
           <p:contentPart p14:bwMode="auto" r:id="rId7">
             <p14:nvContentPartPr>
               <p14:cNvPr id="5" name="Ink 4">
@@ -4878,7 +4878,7 @@
             </p14:xfrm>
           </p:contentPart>
         </mc:Choice>
-        <mc:Fallback>
+        <mc:Fallback xmlns="">
           <p:pic>
             <p:nvPicPr>
               <p:cNvPr id="5" name="Ink 4">
@@ -4909,8 +4909,8 @@
           </p:pic>
         </mc:Fallback>
       </mc:AlternateContent>
-      <mc:AlternateContent xmlns:mc="http://schemas.openxmlformats.org/markup-compatibility/2006">
-        <mc:Choice xmlns:p14="http://schemas.microsoft.com/office/powerpoint/2010/main" Requires="p14">
+      <mc:AlternateContent xmlns:mc="http://schemas.openxmlformats.org/markup-compatibility/2006" xmlns:p14="http://schemas.microsoft.com/office/powerpoint/2010/main">
+        <mc:Choice Requires="p14">
           <p:contentPart p14:bwMode="auto" r:id="rId9">
             <p14:nvContentPartPr>
               <p14:cNvPr id="6" name="Ink 5">
@@ -4929,7 +4929,7 @@
             </p14:xfrm>
           </p:contentPart>
         </mc:Choice>
-        <mc:Fallback>
+        <mc:Fallback xmlns="">
           <p:pic>
             <p:nvPicPr>
               <p:cNvPr id="6" name="Ink 5">
@@ -5069,8 +5069,8 @@
           </a:prstGeom>
         </p:spPr>
       </p:pic>
-      <mc:AlternateContent xmlns:mc="http://schemas.openxmlformats.org/markup-compatibility/2006">
-        <mc:Choice xmlns:p14="http://schemas.microsoft.com/office/powerpoint/2010/main" Requires="p14">
+      <mc:AlternateContent xmlns:mc="http://schemas.openxmlformats.org/markup-compatibility/2006" xmlns:p14="http://schemas.microsoft.com/office/powerpoint/2010/main">
+        <mc:Choice Requires="p14">
           <p:contentPart p14:bwMode="auto" r:id="rId3">
             <p14:nvContentPartPr>
               <p14:cNvPr id="10" name="Ink 9">
@@ -5089,7 +5089,7 @@
             </p14:xfrm>
           </p:contentPart>
         </mc:Choice>
-        <mc:Fallback>
+        <mc:Fallback xmlns="">
           <p:pic>
             <p:nvPicPr>
               <p:cNvPr id="10" name="Ink 9">
@@ -5229,8 +5229,8 @@
           </a:prstGeom>
         </p:spPr>
       </p:pic>
-      <mc:AlternateContent xmlns:mc="http://schemas.openxmlformats.org/markup-compatibility/2006">
-        <mc:Choice xmlns:p14="http://schemas.microsoft.com/office/powerpoint/2010/main" Requires="p14">
+      <mc:AlternateContent xmlns:mc="http://schemas.openxmlformats.org/markup-compatibility/2006" xmlns:p14="http://schemas.microsoft.com/office/powerpoint/2010/main">
+        <mc:Choice Requires="p14">
           <p:contentPart p14:bwMode="auto" r:id="rId3">
             <p14:nvContentPartPr>
               <p14:cNvPr id="3" name="Ink 2">
@@ -5249,7 +5249,7 @@
             </p14:xfrm>
           </p:contentPart>
         </mc:Choice>
-        <mc:Fallback>
+        <mc:Fallback xmlns="">
           <p:pic>
             <p:nvPicPr>
               <p:cNvPr id="3" name="Ink 2">
@@ -5280,8 +5280,8 @@
           </p:pic>
         </mc:Fallback>
       </mc:AlternateContent>
-      <mc:AlternateContent xmlns:mc="http://schemas.openxmlformats.org/markup-compatibility/2006">
-        <mc:Choice xmlns:p14="http://schemas.microsoft.com/office/powerpoint/2010/main" Requires="p14">
+      <mc:AlternateContent xmlns:mc="http://schemas.openxmlformats.org/markup-compatibility/2006" xmlns:p14="http://schemas.microsoft.com/office/powerpoint/2010/main">
+        <mc:Choice Requires="p14">
           <p:contentPart p14:bwMode="auto" r:id="rId5">
             <p14:nvContentPartPr>
               <p14:cNvPr id="7" name="Ink 6">
@@ -5300,7 +5300,7 @@
             </p14:xfrm>
           </p:contentPart>
         </mc:Choice>
-        <mc:Fallback>
+        <mc:Fallback xmlns="">
           <p:pic>
             <p:nvPicPr>
               <p:cNvPr id="7" name="Ink 6">
@@ -5497,7 +5497,7 @@
                   </a:schemeClr>
                 </a:solidFill>
               </a:rPr>
-              <a:t> in  the form of JSON</a:t>
+              <a:t> in the form of JSON</a:t>
             </a:r>
           </a:p>
         </p:txBody>
@@ -5569,7 +5569,7 @@
             <a:r>
               <a:rPr lang="en-US" sz="2000" dirty="0">
                 <a:solidFill>
-                  <a:schemeClr val="accent6">
+                  <a:schemeClr val="accent4">
                     <a:lumMod val="60000"/>
                     <a:lumOff val="40000"/>
                   </a:schemeClr>
@@ -5581,7 +5581,7 @@
           <a:p>
             <a:endParaRPr lang="en-US" sz="2000" dirty="0">
               <a:solidFill>
-                <a:schemeClr val="accent6">
+                <a:schemeClr val="accent4">
                   <a:lumMod val="60000"/>
                   <a:lumOff val="40000"/>
                 </a:schemeClr>
@@ -5592,7 +5592,7 @@
             <a:r>
               <a:rPr lang="en-US" sz="2000" dirty="0">
                 <a:solidFill>
-                  <a:schemeClr val="accent6">
+                  <a:schemeClr val="accent4">
                     <a:lumMod val="60000"/>
                     <a:lumOff val="40000"/>
                   </a:schemeClr>
@@ -5604,7 +5604,7 @@
           <a:p>
             <a:endParaRPr lang="en-US" sz="2000" dirty="0">
               <a:solidFill>
-                <a:schemeClr val="accent6">
+                <a:schemeClr val="accent4">
                   <a:lumMod val="60000"/>
                   <a:lumOff val="40000"/>
                 </a:schemeClr>
@@ -5615,7 +5615,7 @@
             <a:r>
               <a:rPr lang="en-US" sz="2000" dirty="0">
                 <a:solidFill>
-                  <a:schemeClr val="accent6">
+                  <a:schemeClr val="accent4">
                     <a:lumMod val="60000"/>
                     <a:lumOff val="40000"/>
                   </a:schemeClr>
@@ -5628,7 +5628,7 @@
             <a:r>
               <a:rPr lang="en-US" sz="2000" dirty="0">
                 <a:solidFill>
-                  <a:schemeClr val="accent6">
+                  <a:schemeClr val="accent4">
                     <a:lumMod val="60000"/>
                     <a:lumOff val="40000"/>
                   </a:schemeClr>
@@ -5641,7 +5641,7 @@
             <a:r>
               <a:rPr lang="en-US" sz="2000" dirty="0">
                 <a:solidFill>
-                  <a:schemeClr val="accent6">
+                  <a:schemeClr val="accent4">
                     <a:lumMod val="60000"/>
                     <a:lumOff val="40000"/>
                   </a:schemeClr>
@@ -5652,7 +5652,7 @@
             <a:r>
               <a:rPr lang="en-US" sz="2000" dirty="0" err="1">
                 <a:solidFill>
-                  <a:schemeClr val="accent6">
+                  <a:schemeClr val="accent4">
                     <a:lumMod val="60000"/>
                     <a:lumOff val="40000"/>
                   </a:schemeClr>
@@ -5663,7 +5663,7 @@
             <a:r>
               <a:rPr lang="en-US" sz="2000" dirty="0">
                 <a:solidFill>
-                  <a:schemeClr val="accent6">
+                  <a:schemeClr val="accent4">
                     <a:lumMod val="60000"/>
                     <a:lumOff val="40000"/>
                   </a:schemeClr>
@@ -5676,7 +5676,7 @@
             <a:r>
               <a:rPr lang="en-US" sz="2000" dirty="0">
                 <a:solidFill>
-                  <a:schemeClr val="accent6">
+                  <a:schemeClr val="accent4">
                     <a:lumMod val="60000"/>
                     <a:lumOff val="40000"/>
                   </a:schemeClr>
@@ -5689,42 +5689,20 @@
             <a:r>
               <a:rPr lang="en-US" sz="2000" dirty="0">
                 <a:solidFill>
-                  <a:schemeClr val="accent6">
+                  <a:schemeClr val="accent4">
                     <a:lumMod val="60000"/>
                     <a:lumOff val="40000"/>
                   </a:schemeClr>
                 </a:solidFill>
               </a:rPr>
-              <a:t>“</a:t>
-            </a:r>
-            <a:r>
-              <a:rPr lang="en-US" sz="2000" dirty="0" err="1">
-                <a:solidFill>
-                  <a:schemeClr val="accent6">
-                    <a:lumMod val="60000"/>
-                    <a:lumOff val="40000"/>
-                  </a:schemeClr>
-                </a:solidFill>
-              </a:rPr>
-              <a:t>diagonsis</a:t>
-            </a:r>
+              <a:t>“diagnosis”: “diagnosis here”,</a:t>
+            </a:r>
+          </a:p>
+          <a:p>
             <a:r>
               <a:rPr lang="en-US" sz="2000" dirty="0">
                 <a:solidFill>
-                  <a:schemeClr val="accent6">
-                    <a:lumMod val="60000"/>
-                    <a:lumOff val="40000"/>
-                  </a:schemeClr>
-                </a:solidFill>
-              </a:rPr>
-              <a:t>”: “diagnosis here”,</a:t>
-            </a:r>
-          </a:p>
-          <a:p>
-            <a:r>
-              <a:rPr lang="en-US" sz="2000" dirty="0">
-                <a:solidFill>
-                  <a:schemeClr val="accent6">
+                  <a:schemeClr val="accent4">
                     <a:lumMod val="60000"/>
                     <a:lumOff val="40000"/>
                   </a:schemeClr>
@@ -5737,7 +5715,7 @@
             <a:r>
               <a:rPr lang="en-US" sz="2000" dirty="0">
                 <a:solidFill>
-                  <a:schemeClr val="accent6">
+                  <a:schemeClr val="accent4">
                     <a:lumMod val="60000"/>
                     <a:lumOff val="40000"/>
                   </a:schemeClr>
@@ -5869,7 +5847,7 @@
         </p:nvSpPr>
         <p:spPr>
           <a:xfrm>
-            <a:off x="4640062" y="3297426"/>
+            <a:off x="4773684" y="3279138"/>
             <a:ext cx="1691640" cy="1024128"/>
           </a:xfrm>
           <a:prstGeom prst="roundRect">
@@ -5925,7 +5903,7 @@
         </p:nvSpPr>
         <p:spPr>
           <a:xfrm>
-            <a:off x="4023360" y="3630168"/>
+            <a:off x="4170439" y="3626610"/>
             <a:ext cx="521208" cy="329184"/>
           </a:xfrm>
           <a:prstGeom prst="rightArrow">
@@ -5971,7 +5949,7 @@
         </p:nvSpPr>
         <p:spPr>
           <a:xfrm>
-            <a:off x="6427196" y="3617976"/>
+            <a:off x="6568927" y="3626610"/>
             <a:ext cx="521208" cy="329184"/>
           </a:xfrm>
           <a:prstGeom prst="rightArrow">
@@ -6017,8 +5995,8 @@
         </p:nvSpPr>
         <p:spPr>
           <a:xfrm>
-            <a:off x="2266958" y="313132"/>
-            <a:ext cx="7599418" cy="830997"/>
+            <a:off x="512064" y="313132"/>
+            <a:ext cx="10607040" cy="830997"/>
           </a:xfrm>
           <a:prstGeom prst="rect">
             <a:avLst/>
@@ -6096,7 +6074,7 @@
         <p:spPr>
           <a:xfrm>
             <a:off x="190517" y="2435858"/>
-            <a:ext cx="4034011" cy="3416320"/>
+            <a:ext cx="4034011" cy="3785652"/>
           </a:xfrm>
           <a:prstGeom prst="rect">
             <a:avLst/>
@@ -6112,13 +6090,26 @@
             <a:r>
               <a:rPr lang="en-US" sz="2400" dirty="0">
                 <a:solidFill>
-                  <a:schemeClr val="accent6">
+                  <a:schemeClr val="accent4">
                     <a:lumMod val="60000"/>
                     <a:lumOff val="40000"/>
                   </a:schemeClr>
                 </a:solidFill>
               </a:rPr>
-              <a:t>Victoria Gupta, a 27-year-old female, presents with chronic fatigue, muscle pain, and tender points throughout body. Reports unrefreshing sleep and cognitive difficulties. Started on Duloxetine 30mg daily with gradual increase to 60mg.</a:t>
+              <a:t>Victoria Gupta, a 27-year-old female, presents with chronic fatigue, muscle pain, and tender points throughout body. </a:t>
+            </a:r>
+          </a:p>
+          <a:p>
+            <a:r>
+              <a:rPr lang="en-US" sz="2400" dirty="0">
+                <a:solidFill>
+                  <a:schemeClr val="accent4">
+                    <a:lumMod val="60000"/>
+                    <a:lumOff val="40000"/>
+                  </a:schemeClr>
+                </a:solidFill>
+              </a:rPr>
+              <a:t>Reports unrefreshing sleep and cognitive difficulties. Started on Duloxetine 30mg daily with gradual increase to 60mg.</a:t>
             </a:r>
           </a:p>
         </p:txBody>
@@ -6154,7 +6145,7 @@
             <a:r>
               <a:rPr lang="en-US" sz="2400" dirty="0">
                 <a:solidFill>
-                  <a:schemeClr val="accent6">
+                  <a:schemeClr val="accent4">
                     <a:lumMod val="60000"/>
                     <a:lumOff val="40000"/>
                   </a:schemeClr>
@@ -6167,7 +6158,7 @@
             <a:r>
               <a:rPr lang="en-US" sz="2400" dirty="0">
                 <a:solidFill>
-                  <a:schemeClr val="accent6">
+                  <a:schemeClr val="accent4">
                     <a:lumMod val="60000"/>
                     <a:lumOff val="40000"/>
                   </a:schemeClr>
@@ -6180,7 +6171,7 @@
             <a:r>
               <a:rPr lang="en-US" sz="2400" dirty="0">
                 <a:solidFill>
-                  <a:schemeClr val="accent6">
+                  <a:schemeClr val="accent4">
                     <a:lumMod val="60000"/>
                     <a:lumOff val="40000"/>
                   </a:schemeClr>
@@ -6193,7 +6184,7 @@
             <a:r>
               <a:rPr lang="en-US" sz="2400" dirty="0">
                 <a:solidFill>
-                  <a:schemeClr val="accent6">
+                  <a:schemeClr val="accent4">
                     <a:lumMod val="60000"/>
                     <a:lumOff val="40000"/>
                   </a:schemeClr>
@@ -6206,7 +6197,7 @@
             <a:r>
               <a:rPr lang="en-US" sz="2400" dirty="0">
                 <a:solidFill>
-                  <a:schemeClr val="accent6">
+                  <a:schemeClr val="accent4">
                     <a:lumMod val="60000"/>
                     <a:lumOff val="40000"/>
                   </a:schemeClr>
@@ -6219,7 +6210,7 @@
             <a:r>
               <a:rPr lang="en-US" sz="2400" dirty="0">
                 <a:solidFill>
-                  <a:schemeClr val="accent6">
+                  <a:schemeClr val="accent4">
                     <a:lumMod val="60000"/>
                     <a:lumOff val="40000"/>
                   </a:schemeClr>
@@ -6471,7 +6462,7 @@
         <p:spPr>
           <a:xfrm>
             <a:off x="94488" y="2813072"/>
-            <a:ext cx="4034011" cy="1938992"/>
+            <a:ext cx="4034011" cy="2308324"/>
           </a:xfrm>
           <a:prstGeom prst="rect">
             <a:avLst/>
@@ -6487,13 +6478,39 @@
             <a:r>
               <a:rPr lang="en-US" sz="2400" dirty="0">
                 <a:solidFill>
-                  <a:schemeClr val="accent6">
+                  <a:schemeClr val="accent4">
                     <a:lumMod val="60000"/>
                     <a:lumOff val="40000"/>
                   </a:schemeClr>
                 </a:solidFill>
               </a:rPr>
-              <a:t>Mr. Loxford Kumar is a 36 year of age. He is having pain  in  his gum on  left side. Possible tooth decay. Prescribed Helio 50mg daily</a:t>
+              <a:t>Mr. Loxford Kumar is a 36 year of age. </a:t>
+            </a:r>
+          </a:p>
+          <a:p>
+            <a:r>
+              <a:rPr lang="en-US" sz="2400" dirty="0">
+                <a:solidFill>
+                  <a:schemeClr val="accent4">
+                    <a:lumMod val="60000"/>
+                    <a:lumOff val="40000"/>
+                  </a:schemeClr>
+                </a:solidFill>
+              </a:rPr>
+              <a:t>He is having pain  in  his gum on  left side. Possible tooth decay. </a:t>
+            </a:r>
+          </a:p>
+          <a:p>
+            <a:r>
+              <a:rPr lang="en-US" sz="2400" dirty="0">
+                <a:solidFill>
+                  <a:schemeClr val="accent4">
+                    <a:lumMod val="60000"/>
+                    <a:lumOff val="40000"/>
+                  </a:schemeClr>
+                </a:solidFill>
+              </a:rPr>
+              <a:t>Prescribed Helio 50mg daily</a:t>
             </a:r>
           </a:p>
         </p:txBody>
@@ -6529,7 +6546,7 @@
             <a:r>
               <a:rPr lang="en-US" sz="2400" dirty="0">
                 <a:solidFill>
-                  <a:schemeClr val="accent6">
+                  <a:schemeClr val="accent4">
                     <a:lumMod val="60000"/>
                     <a:lumOff val="40000"/>
                   </a:schemeClr>
@@ -6542,7 +6559,7 @@
             <a:r>
               <a:rPr lang="en-US" sz="2400" dirty="0">
                 <a:solidFill>
-                  <a:schemeClr val="accent6">
+                  <a:schemeClr val="accent4">
                     <a:lumMod val="60000"/>
                     <a:lumOff val="40000"/>
                   </a:schemeClr>
@@ -6555,7 +6572,7 @@
             <a:r>
               <a:rPr lang="en-US" sz="2400" dirty="0">
                 <a:solidFill>
-                  <a:schemeClr val="accent6">
+                  <a:schemeClr val="accent4">
                     <a:lumMod val="60000"/>
                     <a:lumOff val="40000"/>
                   </a:schemeClr>
@@ -6568,7 +6585,7 @@
             <a:r>
               <a:rPr lang="en-US" sz="2400" dirty="0">
                 <a:solidFill>
-                  <a:schemeClr val="accent6">
+                  <a:schemeClr val="accent4">
                     <a:lumMod val="60000"/>
                     <a:lumOff val="40000"/>
                   </a:schemeClr>
@@ -6581,7 +6598,7 @@
             <a:r>
               <a:rPr lang="en-US" sz="2400" dirty="0">
                 <a:solidFill>
-                  <a:schemeClr val="accent6">
+                  <a:schemeClr val="accent4">
                     <a:lumMod val="60000"/>
                     <a:lumOff val="40000"/>
                   </a:schemeClr>
@@ -6594,7 +6611,7 @@
             <a:r>
               <a:rPr lang="en-US" sz="2400" dirty="0">
                 <a:solidFill>
-                  <a:schemeClr val="accent6">
+                  <a:schemeClr val="accent4">
                     <a:lumMod val="60000"/>
                     <a:lumOff val="40000"/>
                   </a:schemeClr>
@@ -7594,8 +7611,8 @@
           </a:prstGeom>
         </p:spPr>
       </p:pic>
-      <mc:AlternateContent xmlns:mc="http://schemas.openxmlformats.org/markup-compatibility/2006">
-        <mc:Choice xmlns:p14="http://schemas.microsoft.com/office/powerpoint/2010/main" Requires="p14">
+      <mc:AlternateContent xmlns:mc="http://schemas.openxmlformats.org/markup-compatibility/2006" xmlns:p14="http://schemas.microsoft.com/office/powerpoint/2010/main">
+        <mc:Choice Requires="p14">
           <p:contentPart p14:bwMode="auto" r:id="rId3">
             <p14:nvContentPartPr>
               <p14:cNvPr id="3" name="Ink 2">
@@ -7614,7 +7631,7 @@
             </p14:xfrm>
           </p:contentPart>
         </mc:Choice>
-        <mc:Fallback>
+        <mc:Fallback xmlns="">
           <p:pic>
             <p:nvPicPr>
               <p:cNvPr id="3" name="Ink 2">
@@ -7645,8 +7662,8 @@
           </p:pic>
         </mc:Fallback>
       </mc:AlternateContent>
-      <mc:AlternateContent xmlns:mc="http://schemas.openxmlformats.org/markup-compatibility/2006">
-        <mc:Choice xmlns:p14="http://schemas.microsoft.com/office/powerpoint/2010/main" Requires="p14">
+      <mc:AlternateContent xmlns:mc="http://schemas.openxmlformats.org/markup-compatibility/2006" xmlns:p14="http://schemas.microsoft.com/office/powerpoint/2010/main">
+        <mc:Choice Requires="p14">
           <p:contentPart p14:bwMode="auto" r:id="rId5">
             <p14:nvContentPartPr>
               <p14:cNvPr id="5" name="Ink 4">
@@ -7665,7 +7682,7 @@
             </p14:xfrm>
           </p:contentPart>
         </mc:Choice>
-        <mc:Fallback>
+        <mc:Fallback xmlns="">
           <p:pic>
             <p:nvPicPr>
               <p:cNvPr id="5" name="Ink 4">
@@ -7805,8 +7822,8 @@
           </a:prstGeom>
         </p:spPr>
       </p:pic>
-      <mc:AlternateContent xmlns:mc="http://schemas.openxmlformats.org/markup-compatibility/2006">
-        <mc:Choice xmlns:p14="http://schemas.microsoft.com/office/powerpoint/2010/main" Requires="p14">
+      <mc:AlternateContent xmlns:mc="http://schemas.openxmlformats.org/markup-compatibility/2006" xmlns:p14="http://schemas.microsoft.com/office/powerpoint/2010/main">
+        <mc:Choice Requires="p14">
           <p:contentPart p14:bwMode="auto" r:id="rId3">
             <p14:nvContentPartPr>
               <p14:cNvPr id="6" name="Ink 5">
@@ -7825,7 +7842,7 @@
             </p14:xfrm>
           </p:contentPart>
         </mc:Choice>
-        <mc:Fallback>
+        <mc:Fallback xmlns="">
           <p:pic>
             <p:nvPicPr>
               <p:cNvPr id="6" name="Ink 5">
@@ -7856,8 +7873,8 @@
           </p:pic>
         </mc:Fallback>
       </mc:AlternateContent>
-      <mc:AlternateContent xmlns:mc="http://schemas.openxmlformats.org/markup-compatibility/2006">
-        <mc:Choice xmlns:p14="http://schemas.microsoft.com/office/powerpoint/2010/main" Requires="p14">
+      <mc:AlternateContent xmlns:mc="http://schemas.openxmlformats.org/markup-compatibility/2006" xmlns:p14="http://schemas.microsoft.com/office/powerpoint/2010/main">
+        <mc:Choice Requires="p14">
           <p:contentPart p14:bwMode="auto" r:id="rId5">
             <p14:nvContentPartPr>
               <p14:cNvPr id="8" name="Ink 7">
@@ -7876,7 +7893,7 @@
             </p14:xfrm>
           </p:contentPart>
         </mc:Choice>
-        <mc:Fallback>
+        <mc:Fallback xmlns="">
           <p:pic>
             <p:nvPicPr>
               <p:cNvPr id="8" name="Ink 7">
@@ -8038,8 +8055,8 @@
           </a:prstGeom>
         </p:spPr>
       </p:pic>
-      <mc:AlternateContent xmlns:mc="http://schemas.openxmlformats.org/markup-compatibility/2006">
-        <mc:Choice xmlns:p14="http://schemas.microsoft.com/office/powerpoint/2010/main" Requires="p14">
+      <mc:AlternateContent xmlns:mc="http://schemas.openxmlformats.org/markup-compatibility/2006" xmlns:p14="http://schemas.microsoft.com/office/powerpoint/2010/main">
+        <mc:Choice Requires="p14">
           <p:contentPart p14:bwMode="auto" r:id="rId3">
             <p14:nvContentPartPr>
               <p14:cNvPr id="9" name="Ink 8">
@@ -8058,7 +8075,7 @@
             </p14:xfrm>
           </p:contentPart>
         </mc:Choice>
-        <mc:Fallback>
+        <mc:Fallback xmlns="">
           <p:pic>
             <p:nvPicPr>
               <p:cNvPr id="9" name="Ink 8">
@@ -8089,8 +8106,8 @@
           </p:pic>
         </mc:Fallback>
       </mc:AlternateContent>
-      <mc:AlternateContent xmlns:mc="http://schemas.openxmlformats.org/markup-compatibility/2006">
-        <mc:Choice xmlns:p14="http://schemas.microsoft.com/office/powerpoint/2010/main" Requires="p14">
+      <mc:AlternateContent xmlns:mc="http://schemas.openxmlformats.org/markup-compatibility/2006" xmlns:p14="http://schemas.microsoft.com/office/powerpoint/2010/main">
+        <mc:Choice Requires="p14">
           <p:contentPart p14:bwMode="auto" r:id="rId5">
             <p14:nvContentPartPr>
               <p14:cNvPr id="10" name="Ink 9">
@@ -8109,7 +8126,7 @@
             </p14:xfrm>
           </p:contentPart>
         </mc:Choice>
-        <mc:Fallback>
+        <mc:Fallback xmlns="">
           <p:pic>
             <p:nvPicPr>
               <p:cNvPr id="10" name="Ink 9">
@@ -8140,8 +8157,8 @@
           </p:pic>
         </mc:Fallback>
       </mc:AlternateContent>
-      <mc:AlternateContent xmlns:mc="http://schemas.openxmlformats.org/markup-compatibility/2006">
-        <mc:Choice xmlns:p14="http://schemas.microsoft.com/office/powerpoint/2010/main" Requires="p14">
+      <mc:AlternateContent xmlns:mc="http://schemas.openxmlformats.org/markup-compatibility/2006" xmlns:p14="http://schemas.microsoft.com/office/powerpoint/2010/main">
+        <mc:Choice Requires="p14">
           <p:contentPart p14:bwMode="auto" r:id="rId7">
             <p14:nvContentPartPr>
               <p14:cNvPr id="11" name="Ink 10">
@@ -8160,7 +8177,7 @@
             </p14:xfrm>
           </p:contentPart>
         </mc:Choice>
-        <mc:Fallback>
+        <mc:Fallback xmlns="">
           <p:pic>
             <p:nvPicPr>
               <p:cNvPr id="11" name="Ink 10">
